--- a/public/downloads/US-114051-L3-Chairing-the-Meeting.pptx
+++ b/public/downloads/US-114051-L3-Chairing-the-Meeting.pptx
@@ -12,9 +12,13 @@
     <p:sldId id="260" r:id="rId6"/>
     <p:sldId id="261" r:id="rId7"/>
     <p:sldId id="262" r:id="rId8"/>
+    <p:sldId id="263" r:id="rId9"/>
+    <p:sldId id="264" r:id="rId10"/>
+    <p:sldId id="265" r:id="rId11"/>
+    <p:sldId id="266" r:id="rId12"/>
   </p:sldIdLst>
   <p:notesMasterIdLst>
-    <p:notesMasterId r:id="rId9"/>
+    <p:notesMasterId r:id="rId13"/>
   </p:notesMasterIdLst>
   <p:sldSz cx="12188952" cy="6858000"/>
   <p:notesSz cx="6858000" cy="12188952"/>
@@ -550,6 +554,182 @@
 </p:notes>
 </file>
 
+<file path=ppt/notesSlides/notesSlide10.xml><?xml version="1.0" encoding="utf-8"?>
+<p:notes xmlns:a="http://schemas.openxmlformats.org/drawingml/2006/main" xmlns:r="http://schemas.openxmlformats.org/officeDocument/2006/relationships" xmlns:p="http://schemas.openxmlformats.org/presentationml/2006/main">
+  <p:cSld>
+    <p:spTree>
+      <p:nvGrpSpPr>
+        <p:cNvPr id="1" name=""/>
+        <p:cNvGrpSpPr/>
+        <p:nvPr/>
+      </p:nvGrpSpPr>
+      <p:grpSpPr>
+        <a:xfrm>
+          <a:off x="0" y="0"/>
+          <a:ext cx="0" cy="0"/>
+          <a:chOff x="0" y="0"/>
+          <a:chExt cx="0" cy="0"/>
+        </a:xfrm>
+      </p:grpSpPr>
+      <p:sp>
+        <p:nvSpPr>
+          <p:cNvPr id="2" name="Slide Image Placeholder 1"/>
+          <p:cNvSpPr>
+            <a:spLocks noGrp="1" noRot="1" noChangeAspect="1"/>
+          </p:cNvSpPr>
+          <p:nvPr>
+            <p:ph type="sldImg"/>
+          </p:nvPr>
+        </p:nvSpPr>
+        <p:spPr/>
+      </p:sp>
+      <p:sp>
+        <p:nvSpPr>
+          <p:cNvPr id="3" name="Notes Placeholder 2"/>
+          <p:cNvSpPr>
+            <a:spLocks noGrp="1"/>
+          </p:cNvSpPr>
+          <p:nvPr>
+            <p:ph type="body" idx="1"/>
+          </p:nvPr>
+        </p:nvSpPr>
+        <p:spPr/>
+        <p:txBody>
+          <a:bodyPr/>
+          <a:lstStyle/>
+          <a:p>
+            <a:r>
+              <a:rPr lang="en-US" dirty="0"/>
+              <a:t/>
+            </a:r>
+            <a:endParaRPr lang="en-US" dirty="0"/>
+          </a:p>
+        </p:txBody>
+      </p:sp>
+      <p:sp>
+        <p:nvSpPr>
+          <p:cNvPr id="4" name="Slide Number Placeholder 3"/>
+          <p:cNvSpPr>
+            <a:spLocks noGrp="1"/>
+          </p:cNvSpPr>
+          <p:nvPr>
+            <p:ph type="sldNum" sz="quarter" idx="10"/>
+          </p:nvPr>
+        </p:nvSpPr>
+        <p:spPr/>
+        <p:txBody>
+          <a:bodyPr/>
+          <a:lstStyle/>
+          <a:p>
+            <a:fld id="{F7021451-1387-4CA6-816F-3879F97B5CBC}" type="slidenum">
+              <a:rPr lang="en-US"/>
+              <a:t>10</a:t>
+            </a:fld>
+            <a:endParaRPr lang="en-US"/>
+          </a:p>
+        </p:txBody>
+      </p:sp>
+    </p:spTree>
+    <p:extLst>
+      <p:ext uri="{BB962C8B-B14F-4D97-AF65-F5344CB8AC3E}">
+        <p14:creationId xmlns:p14="http://schemas.microsoft.com/office/powerpoint/2010/main" val="1024086991"/>
+      </p:ext>
+    </p:extLst>
+  </p:cSld>
+  <p:clrMapOvr>
+    <a:masterClrMapping/>
+  </p:clrMapOvr>
+</p:notes>
+</file>
+
+<file path=ppt/notesSlides/notesSlide11.xml><?xml version="1.0" encoding="utf-8"?>
+<p:notes xmlns:a="http://schemas.openxmlformats.org/drawingml/2006/main" xmlns:r="http://schemas.openxmlformats.org/officeDocument/2006/relationships" xmlns:p="http://schemas.openxmlformats.org/presentationml/2006/main">
+  <p:cSld>
+    <p:spTree>
+      <p:nvGrpSpPr>
+        <p:cNvPr id="1" name=""/>
+        <p:cNvGrpSpPr/>
+        <p:nvPr/>
+      </p:nvGrpSpPr>
+      <p:grpSpPr>
+        <a:xfrm>
+          <a:off x="0" y="0"/>
+          <a:ext cx="0" cy="0"/>
+          <a:chOff x="0" y="0"/>
+          <a:chExt cx="0" cy="0"/>
+        </a:xfrm>
+      </p:grpSpPr>
+      <p:sp>
+        <p:nvSpPr>
+          <p:cNvPr id="2" name="Slide Image Placeholder 1"/>
+          <p:cNvSpPr>
+            <a:spLocks noGrp="1" noRot="1" noChangeAspect="1"/>
+          </p:cNvSpPr>
+          <p:nvPr>
+            <p:ph type="sldImg"/>
+          </p:nvPr>
+        </p:nvSpPr>
+        <p:spPr/>
+      </p:sp>
+      <p:sp>
+        <p:nvSpPr>
+          <p:cNvPr id="3" name="Notes Placeholder 2"/>
+          <p:cNvSpPr>
+            <a:spLocks noGrp="1"/>
+          </p:cNvSpPr>
+          <p:nvPr>
+            <p:ph type="body" idx="1"/>
+          </p:nvPr>
+        </p:nvSpPr>
+        <p:spPr/>
+        <p:txBody>
+          <a:bodyPr/>
+          <a:lstStyle/>
+          <a:p>
+            <a:r>
+              <a:rPr lang="en-US" dirty="0"/>
+              <a:t/>
+            </a:r>
+            <a:endParaRPr lang="en-US" dirty="0"/>
+          </a:p>
+        </p:txBody>
+      </p:sp>
+      <p:sp>
+        <p:nvSpPr>
+          <p:cNvPr id="4" name="Slide Number Placeholder 3"/>
+          <p:cNvSpPr>
+            <a:spLocks noGrp="1"/>
+          </p:cNvSpPr>
+          <p:nvPr>
+            <p:ph type="sldNum" sz="quarter" idx="10"/>
+          </p:nvPr>
+        </p:nvSpPr>
+        <p:spPr/>
+        <p:txBody>
+          <a:bodyPr/>
+          <a:lstStyle/>
+          <a:p>
+            <a:fld id="{F7021451-1387-4CA6-816F-3879F97B5CBC}" type="slidenum">
+              <a:rPr lang="en-US"/>
+              <a:t>11</a:t>
+            </a:fld>
+            <a:endParaRPr lang="en-US"/>
+          </a:p>
+        </p:txBody>
+      </p:sp>
+    </p:spTree>
+    <p:extLst>
+      <p:ext uri="{BB962C8B-B14F-4D97-AF65-F5344CB8AC3E}">
+        <p14:creationId xmlns:p14="http://schemas.microsoft.com/office/powerpoint/2010/main" val="1024086991"/>
+      </p:ext>
+    </p:extLst>
+  </p:cSld>
+  <p:clrMapOvr>
+    <a:masterClrMapping/>
+  </p:clrMapOvr>
+</p:notes>
+</file>
+
 <file path=ppt/notesSlides/notesSlide2.xml><?xml version="1.0" encoding="utf-8"?>
 <p:notes xmlns:a="http://schemas.openxmlformats.org/drawingml/2006/main" xmlns:r="http://schemas.openxmlformats.org/officeDocument/2006/relationships" xmlns:p="http://schemas.openxmlformats.org/presentationml/2006/main">
   <p:cSld>
@@ -1060,6 +1240,182 @@
             <a:fld id="{F7021451-1387-4CA6-816F-3879F97B5CBC}" type="slidenum">
               <a:rPr lang="en-US"/>
               <a:t>7</a:t>
+            </a:fld>
+            <a:endParaRPr lang="en-US"/>
+          </a:p>
+        </p:txBody>
+      </p:sp>
+    </p:spTree>
+    <p:extLst>
+      <p:ext uri="{BB962C8B-B14F-4D97-AF65-F5344CB8AC3E}">
+        <p14:creationId xmlns:p14="http://schemas.microsoft.com/office/powerpoint/2010/main" val="1024086991"/>
+      </p:ext>
+    </p:extLst>
+  </p:cSld>
+  <p:clrMapOvr>
+    <a:masterClrMapping/>
+  </p:clrMapOvr>
+</p:notes>
+</file>
+
+<file path=ppt/notesSlides/notesSlide8.xml><?xml version="1.0" encoding="utf-8"?>
+<p:notes xmlns:a="http://schemas.openxmlformats.org/drawingml/2006/main" xmlns:r="http://schemas.openxmlformats.org/officeDocument/2006/relationships" xmlns:p="http://schemas.openxmlformats.org/presentationml/2006/main">
+  <p:cSld>
+    <p:spTree>
+      <p:nvGrpSpPr>
+        <p:cNvPr id="1" name=""/>
+        <p:cNvGrpSpPr/>
+        <p:nvPr/>
+      </p:nvGrpSpPr>
+      <p:grpSpPr>
+        <a:xfrm>
+          <a:off x="0" y="0"/>
+          <a:ext cx="0" cy="0"/>
+          <a:chOff x="0" y="0"/>
+          <a:chExt cx="0" cy="0"/>
+        </a:xfrm>
+      </p:grpSpPr>
+      <p:sp>
+        <p:nvSpPr>
+          <p:cNvPr id="2" name="Slide Image Placeholder 1"/>
+          <p:cNvSpPr>
+            <a:spLocks noGrp="1" noRot="1" noChangeAspect="1"/>
+          </p:cNvSpPr>
+          <p:nvPr>
+            <p:ph type="sldImg"/>
+          </p:nvPr>
+        </p:nvSpPr>
+        <p:spPr/>
+      </p:sp>
+      <p:sp>
+        <p:nvSpPr>
+          <p:cNvPr id="3" name="Notes Placeholder 2"/>
+          <p:cNvSpPr>
+            <a:spLocks noGrp="1"/>
+          </p:cNvSpPr>
+          <p:nvPr>
+            <p:ph type="body" idx="1"/>
+          </p:nvPr>
+        </p:nvSpPr>
+        <p:spPr/>
+        <p:txBody>
+          <a:bodyPr/>
+          <a:lstStyle/>
+          <a:p>
+            <a:r>
+              <a:rPr lang="en-US" dirty="0"/>
+              <a:t/>
+            </a:r>
+            <a:endParaRPr lang="en-US" dirty="0"/>
+          </a:p>
+        </p:txBody>
+      </p:sp>
+      <p:sp>
+        <p:nvSpPr>
+          <p:cNvPr id="4" name="Slide Number Placeholder 3"/>
+          <p:cNvSpPr>
+            <a:spLocks noGrp="1"/>
+          </p:cNvSpPr>
+          <p:nvPr>
+            <p:ph type="sldNum" sz="quarter" idx="10"/>
+          </p:nvPr>
+        </p:nvSpPr>
+        <p:spPr/>
+        <p:txBody>
+          <a:bodyPr/>
+          <a:lstStyle/>
+          <a:p>
+            <a:fld id="{F7021451-1387-4CA6-816F-3879F97B5CBC}" type="slidenum">
+              <a:rPr lang="en-US"/>
+              <a:t>8</a:t>
+            </a:fld>
+            <a:endParaRPr lang="en-US"/>
+          </a:p>
+        </p:txBody>
+      </p:sp>
+    </p:spTree>
+    <p:extLst>
+      <p:ext uri="{BB962C8B-B14F-4D97-AF65-F5344CB8AC3E}">
+        <p14:creationId xmlns:p14="http://schemas.microsoft.com/office/powerpoint/2010/main" val="1024086991"/>
+      </p:ext>
+    </p:extLst>
+  </p:cSld>
+  <p:clrMapOvr>
+    <a:masterClrMapping/>
+  </p:clrMapOvr>
+</p:notes>
+</file>
+
+<file path=ppt/notesSlides/notesSlide9.xml><?xml version="1.0" encoding="utf-8"?>
+<p:notes xmlns:a="http://schemas.openxmlformats.org/drawingml/2006/main" xmlns:r="http://schemas.openxmlformats.org/officeDocument/2006/relationships" xmlns:p="http://schemas.openxmlformats.org/presentationml/2006/main">
+  <p:cSld>
+    <p:spTree>
+      <p:nvGrpSpPr>
+        <p:cNvPr id="1" name=""/>
+        <p:cNvGrpSpPr/>
+        <p:nvPr/>
+      </p:nvGrpSpPr>
+      <p:grpSpPr>
+        <a:xfrm>
+          <a:off x="0" y="0"/>
+          <a:ext cx="0" cy="0"/>
+          <a:chOff x="0" y="0"/>
+          <a:chExt cx="0" cy="0"/>
+        </a:xfrm>
+      </p:grpSpPr>
+      <p:sp>
+        <p:nvSpPr>
+          <p:cNvPr id="2" name="Slide Image Placeholder 1"/>
+          <p:cNvSpPr>
+            <a:spLocks noGrp="1" noRot="1" noChangeAspect="1"/>
+          </p:cNvSpPr>
+          <p:nvPr>
+            <p:ph type="sldImg"/>
+          </p:nvPr>
+        </p:nvSpPr>
+        <p:spPr/>
+      </p:sp>
+      <p:sp>
+        <p:nvSpPr>
+          <p:cNvPr id="3" name="Notes Placeholder 2"/>
+          <p:cNvSpPr>
+            <a:spLocks noGrp="1"/>
+          </p:cNvSpPr>
+          <p:nvPr>
+            <p:ph type="body" idx="1"/>
+          </p:nvPr>
+        </p:nvSpPr>
+        <p:spPr/>
+        <p:txBody>
+          <a:bodyPr/>
+          <a:lstStyle/>
+          <a:p>
+            <a:r>
+              <a:rPr lang="en-US" dirty="0"/>
+              <a:t/>
+            </a:r>
+            <a:endParaRPr lang="en-US" dirty="0"/>
+          </a:p>
+        </p:txBody>
+      </p:sp>
+      <p:sp>
+        <p:nvSpPr>
+          <p:cNvPr id="4" name="Slide Number Placeholder 3"/>
+          <p:cNvSpPr>
+            <a:spLocks noGrp="1"/>
+          </p:cNvSpPr>
+          <p:nvPr>
+            <p:ph type="sldNum" sz="quarter" idx="10"/>
+          </p:nvPr>
+        </p:nvSpPr>
+        <p:spPr/>
+        <p:txBody>
+          <a:bodyPr/>
+          <a:lstStyle/>
+          <a:p>
+            <a:fld id="{F7021451-1387-4CA6-816F-3879F97B5CBC}" type="slidenum">
+              <a:rPr lang="en-US"/>
+              <a:t>9</a:t>
             </a:fld>
             <a:endParaRPr lang="en-US"/>
           </a:p>
@@ -1565,7 +1921,7 @@
                 <a:ea typeface="Aptos" pitchFamily="34" charset="-122"/>
                 <a:cs typeface="Aptos" pitchFamily="34" charset="-120"/>
               </a:rPr>
-              <a:t>Rules the members own, conventions applied fairly, a published agenda followed — and clear decisions with timeframes</a:t>
+              <a:t>Rules the members own, the agenda followed step by step, everyone participating — and clear decisions with owners and timeframes</a:t>
             </a:r>
             <a:endParaRPr lang="en-US" sz="1900" dirty="0"/>
           </a:p>
@@ -1982,6 +2338,958 @@
                 <a:cs typeface="Aptos" pitchFamily="34" charset="-120"/>
               </a:rPr>
               <a:t>ITSS Learn · Investec · Corporate Banking Technology</a:t>
+            </a:r>
+            <a:endParaRPr lang="en-US" sz="1800" dirty="0"/>
+          </a:p>
+        </p:txBody>
+      </p:sp>
+    </p:spTree>
+  </p:cSld>
+  <p:clrMapOvr>
+    <a:masterClrMapping/>
+  </p:clrMapOvr>
+</p:sld>
+</file>
+
+<file path=ppt/slides/slide10.xml><?xml version="1.0" encoding="utf-8"?>
+<p:sld xmlns:a="http://schemas.openxmlformats.org/drawingml/2006/main" xmlns:r="http://schemas.openxmlformats.org/officeDocument/2006/relationships" xmlns:p="http://schemas.openxmlformats.org/presentationml/2006/main">
+  <p:cSld name="Slide 10">
+    <p:bg>
+      <p:bgPr>
+        <a:solidFill>
+          <a:srgbClr val="FFFFFF"/>
+        </a:solidFill>
+      </p:bgPr>
+    </p:bg>
+    <p:spTree>
+      <p:nvGrpSpPr>
+        <p:cNvPr id="1" name=""/>
+        <p:cNvGrpSpPr/>
+        <p:nvPr/>
+      </p:nvGrpSpPr>
+      <p:grpSpPr>
+        <a:xfrm>
+          <a:off x="0" y="0"/>
+          <a:ext cx="0" cy="0"/>
+          <a:chOff x="0" y="0"/>
+          <a:chExt cx="0" cy="0"/>
+        </a:xfrm>
+      </p:grpSpPr>
+      <p:sp>
+        <p:nvSpPr>
+          <p:cNvPr id="2" name="Text 0"/>
+          <p:cNvSpPr/>
+          <p:nvPr/>
+        </p:nvSpPr>
+        <p:spPr>
+          <a:xfrm>
+            <a:off x="502920" y="6400800"/>
+            <a:ext cx="10268712" cy="347472"/>
+          </a:xfrm>
+          <a:prstGeom prst="rect">
+            <a:avLst/>
+          </a:prstGeom>
+          <a:noFill/>
+          <a:ln/>
+        </p:spPr>
+        <p:txBody>
+          <a:bodyPr wrap="square" rtlCol="0" anchor="ctr"/>
+          <a:lstStyle/>
+          <a:p>
+            <a:pPr indent="0" marL="0">
+              <a:buNone/>
+            </a:pPr>
+            <a:r>
+              <a:rPr lang="en-US" sz="1800" dirty="0">
+                <a:solidFill>
+                  <a:srgbClr val="6B7280"/>
+                </a:solidFill>
+                <a:latin typeface="Aptos" pitchFamily="34" charset="0"/>
+                <a:ea typeface="Aptos" pitchFamily="34" charset="-122"/>
+                <a:cs typeface="Aptos" pitchFamily="34" charset="-120"/>
+              </a:rPr>
+              <a:t>US 114051 · Conduct a technical practitioners meeting · NQF 5 · 4 credits</a:t>
+            </a:r>
+            <a:endParaRPr lang="en-US" sz="1800" dirty="0"/>
+          </a:p>
+        </p:txBody>
+      </p:sp>
+      <p:sp>
+        <p:nvSpPr>
+          <p:cNvPr id="3" name="Text 1"/>
+          <p:cNvSpPr/>
+          <p:nvPr/>
+        </p:nvSpPr>
+        <p:spPr>
+          <a:xfrm>
+            <a:off x="11045952" y="6400800"/>
+            <a:ext cx="640080" cy="347472"/>
+          </a:xfrm>
+          <a:prstGeom prst="rect">
+            <a:avLst/>
+          </a:prstGeom>
+          <a:noFill/>
+          <a:ln/>
+        </p:spPr>
+        <p:txBody>
+          <a:bodyPr wrap="square" rtlCol="0" anchor="ctr"/>
+          <a:lstStyle/>
+          <a:p>
+            <a:pPr algn="r" indent="0" marL="0">
+              <a:buNone/>
+            </a:pPr>
+            <a:r>
+              <a:rPr lang="en-US" sz="1800" dirty="0">
+                <a:solidFill>
+                  <a:srgbClr val="6B7280"/>
+                </a:solidFill>
+                <a:latin typeface="Aptos" pitchFamily="34" charset="0"/>
+                <a:ea typeface="Aptos" pitchFamily="34" charset="-122"/>
+                <a:cs typeface="Aptos" pitchFamily="34" charset="-120"/>
+              </a:rPr>
+              <a:t>10</a:t>
+            </a:r>
+            <a:endParaRPr lang="en-US" sz="1800" dirty="0"/>
+          </a:p>
+        </p:txBody>
+      </p:sp>
+      <p:sp>
+        <p:nvSpPr>
+          <p:cNvPr id="4" name="Shape 2"/>
+          <p:cNvSpPr/>
+          <p:nvPr/>
+        </p:nvSpPr>
+        <p:spPr>
+          <a:xfrm>
+            <a:off x="0" y="0"/>
+            <a:ext cx="12188952" cy="82296"/>
+          </a:xfrm>
+          <a:prstGeom prst="rect">
+            <a:avLst/>
+          </a:prstGeom>
+          <a:solidFill>
+            <a:srgbClr val="0F6CBD"/>
+          </a:solidFill>
+          <a:ln/>
+        </p:spPr>
+      </p:sp>
+      <p:sp>
+        <p:nvSpPr>
+          <p:cNvPr id="5" name="Text 3"/>
+          <p:cNvSpPr/>
+          <p:nvPr/>
+        </p:nvSpPr>
+        <p:spPr>
+          <a:xfrm>
+            <a:off x="502920" y="237744"/>
+            <a:ext cx="11183112" cy="347472"/>
+          </a:xfrm>
+          <a:prstGeom prst="rect">
+            <a:avLst/>
+          </a:prstGeom>
+          <a:noFill/>
+          <a:ln/>
+        </p:spPr>
+        <p:txBody>
+          <a:bodyPr wrap="square" rtlCol="0" anchor="ctr"/>
+          <a:lstStyle/>
+          <a:p>
+            <a:pPr indent="0" marL="0">
+              <a:buNone/>
+            </a:pPr>
+            <a:r>
+              <a:rPr lang="en-US" sz="1800" b="1" spc="200" kern="0" dirty="0">
+                <a:solidFill>
+                  <a:srgbClr val="0F6CBD"/>
+                </a:solidFill>
+                <a:latin typeface="Aptos" pitchFamily="34" charset="0"/>
+                <a:ea typeface="Aptos" pitchFamily="34" charset="-122"/>
+                <a:cs typeface="Aptos" pitchFamily="34" charset="-120"/>
+              </a:rPr>
+              <a:t>NOW PROVE IT</a:t>
+            </a:r>
+            <a:endParaRPr lang="en-US" sz="1800" dirty="0"/>
+          </a:p>
+        </p:txBody>
+      </p:sp>
+      <p:sp>
+        <p:nvSpPr>
+          <p:cNvPr id="6" name="Text 4"/>
+          <p:cNvSpPr/>
+          <p:nvPr/>
+        </p:nvSpPr>
+        <p:spPr>
+          <a:xfrm>
+            <a:off x="502920" y="585216"/>
+            <a:ext cx="11183112" cy="603504"/>
+          </a:xfrm>
+          <a:prstGeom prst="rect">
+            <a:avLst/>
+          </a:prstGeom>
+          <a:noFill/>
+          <a:ln/>
+        </p:spPr>
+        <p:txBody>
+          <a:bodyPr wrap="square" rtlCol="0" anchor="ctr"/>
+          <a:lstStyle/>
+          <a:p>
+            <a:pPr indent="0" marL="0">
+              <a:buNone/>
+            </a:pPr>
+            <a:r>
+              <a:rPr lang="en-US" sz="3000" b="1" dirty="0">
+                <a:solidFill>
+                  <a:srgbClr val="002050"/>
+                </a:solidFill>
+                <a:latin typeface="Aptos Display" pitchFamily="34" charset="0"/>
+                <a:ea typeface="Aptos Display" pitchFamily="34" charset="-122"/>
+                <a:cs typeface="Aptos Display" pitchFamily="34" charset="-120"/>
+              </a:rPr>
+              <a:t>Your work for Specific Outcome 3</a:t>
+            </a:r>
+            <a:endParaRPr lang="en-US" sz="3000" dirty="0"/>
+          </a:p>
+        </p:txBody>
+      </p:sp>
+      <p:sp>
+        <p:nvSpPr>
+          <p:cNvPr id="7" name="Shape 5"/>
+          <p:cNvSpPr/>
+          <p:nvPr/>
+        </p:nvSpPr>
+        <p:spPr>
+          <a:xfrm>
+            <a:off x="502920" y="1828800"/>
+            <a:ext cx="3605784" cy="2651760"/>
+          </a:xfrm>
+          <a:prstGeom prst="roundRect">
+            <a:avLst>
+              <a:gd name="adj" fmla="val 3103"/>
+            </a:avLst>
+          </a:prstGeom>
+          <a:solidFill>
+            <a:srgbClr val="FFFFFF"/>
+          </a:solidFill>
+          <a:ln w="12700">
+            <a:solidFill>
+              <a:srgbClr val="D5E3F2"/>
+            </a:solidFill>
+            <a:prstDash val="solid"/>
+          </a:ln>
+          <a:effectLst>
+            <a:outerShdw sx="100000" sy="100000" kx="0" ky="0" algn="bl" rotWithShape="0" blurRad="88900" dist="25400" dir="5400000">
+              <a:srgbClr val="9AB4CC">
+                <a:alpha val="30000"/>
+              </a:srgbClr>
+            </a:outerShdw>
+          </a:effectLst>
+        </p:spPr>
+      </p:sp>
+      <p:pic>
+        <p:nvPicPr>
+          <p:cNvPr id="8" name="Image 0" descr="preencoded.png">    </p:cNvPr>
+          <p:cNvPicPr>
+            <a:picLocks noChangeAspect="1"/>
+          </p:cNvPicPr>
+          <p:nvPr/>
+        </p:nvPicPr>
+        <p:blipFill>
+          <a:blip r:embed="rId1">
+            <a:extLst>
+              <a:ext uri="{96DAC541-7B7A-43D3-8B79-37D633B846F1}">
+                <asvg:svgBlip xmlns:asvg="http://schemas.microsoft.com/office/drawing/2016/SVG/main" r:embed="rId2"/>
+              </a:ext>
+            </a:extLst>
+          </a:blip>
+          <a:stretch>
+            <a:fillRect/>
+          </a:stretch>
+        </p:blipFill>
+        <p:spPr>
+          <a:xfrm>
+            <a:off x="667512" y="2011680"/>
+            <a:ext cx="347472" cy="347472"/>
+          </a:xfrm>
+          <a:prstGeom prst="rect">
+            <a:avLst/>
+          </a:prstGeom>
+        </p:spPr>
+      </p:pic>
+      <p:sp>
+        <p:nvSpPr>
+          <p:cNvPr id="9" name="Text 6"/>
+          <p:cNvSpPr/>
+          <p:nvPr/>
+        </p:nvSpPr>
+        <p:spPr>
+          <a:xfrm>
+            <a:off x="1106424" y="1938528"/>
+            <a:ext cx="2837688" cy="777240"/>
+          </a:xfrm>
+          <a:prstGeom prst="rect">
+            <a:avLst/>
+          </a:prstGeom>
+          <a:noFill/>
+          <a:ln/>
+        </p:spPr>
+        <p:txBody>
+          <a:bodyPr wrap="square" rtlCol="0" anchor="ctr"/>
+          <a:lstStyle/>
+          <a:p>
+            <a:pPr indent="0" marL="0">
+              <a:lnSpc>
+                <a:spcPct val="100000"/>
+              </a:lnSpc>
+              <a:buNone/>
+            </a:pPr>
+            <a:r>
+              <a:rPr lang="en-US" sz="2000" b="1" dirty="0">
+                <a:solidFill>
+                  <a:srgbClr val="002050"/>
+                </a:solidFill>
+                <a:latin typeface="Aptos Display" pitchFamily="34" charset="0"/>
+                <a:ea typeface="Aptos Display" pitchFamily="34" charset="-122"/>
+                <a:cs typeface="Aptos Display" pitchFamily="34" charset="-120"/>
+              </a:rPr>
+              <a:t>Chair a meeting</a:t>
+            </a:r>
+            <a:endParaRPr lang="en-US" sz="2000" dirty="0"/>
+          </a:p>
+        </p:txBody>
+      </p:sp>
+      <p:sp>
+        <p:nvSpPr>
+          <p:cNvPr id="10" name="Text 7"/>
+          <p:cNvSpPr/>
+          <p:nvPr/>
+        </p:nvSpPr>
+        <p:spPr>
+          <a:xfrm>
+            <a:off x="667512" y="2761488"/>
+            <a:ext cx="3276600" cy="1591056"/>
+          </a:xfrm>
+          <a:prstGeom prst="rect">
+            <a:avLst/>
+          </a:prstGeom>
+          <a:noFill/>
+          <a:ln/>
+        </p:spPr>
+        <p:txBody>
+          <a:bodyPr wrap="square" rtlCol="0" anchor="t"/>
+          <a:lstStyle/>
+          <a:p>
+            <a:pPr indent="0" marL="0">
+              <a:lnSpc>
+                <a:spcPct val="110000"/>
+              </a:lnSpc>
+              <a:buNone/>
+            </a:pPr>
+            <a:r>
+              <a:rPr lang="en-US" sz="1800" dirty="0">
+                <a:solidFill>
+                  <a:srgbClr val="6B7280"/>
+                </a:solidFill>
+                <a:latin typeface="Aptos" pitchFamily="34" charset="0"/>
+                <a:ea typeface="Aptos" pitchFamily="34" charset="-122"/>
+                <a:cs typeface="Aptos" pitchFamily="34" charset="-120"/>
+              </a:rPr>
+              <a:t>Role-play practical: chair a 10-minute technical meeting from a scenario card — observed evidence.</a:t>
+            </a:r>
+            <a:endParaRPr lang="en-US" sz="1800" dirty="0"/>
+          </a:p>
+        </p:txBody>
+      </p:sp>
+      <p:sp>
+        <p:nvSpPr>
+          <p:cNvPr id="11" name="Shape 8"/>
+          <p:cNvSpPr/>
+          <p:nvPr/>
+        </p:nvSpPr>
+        <p:spPr>
+          <a:xfrm>
+            <a:off x="4291584" y="1828800"/>
+            <a:ext cx="3605784" cy="2651760"/>
+          </a:xfrm>
+          <a:prstGeom prst="roundRect">
+            <a:avLst>
+              <a:gd name="adj" fmla="val 3103"/>
+            </a:avLst>
+          </a:prstGeom>
+          <a:solidFill>
+            <a:srgbClr val="FFFFFF"/>
+          </a:solidFill>
+          <a:ln w="12700">
+            <a:solidFill>
+              <a:srgbClr val="D5E3F2"/>
+            </a:solidFill>
+            <a:prstDash val="solid"/>
+          </a:ln>
+          <a:effectLst>
+            <a:outerShdw sx="100000" sy="100000" kx="0" ky="0" algn="bl" rotWithShape="0" blurRad="88900" dist="25400" dir="5400000">
+              <a:srgbClr val="9AB4CC">
+                <a:alpha val="30000"/>
+              </a:srgbClr>
+            </a:outerShdw>
+          </a:effectLst>
+        </p:spPr>
+      </p:sp>
+      <p:pic>
+        <p:nvPicPr>
+          <p:cNvPr id="12" name="Image 1" descr="preencoded.png">    </p:cNvPr>
+          <p:cNvPicPr>
+            <a:picLocks noChangeAspect="1"/>
+          </p:cNvPicPr>
+          <p:nvPr/>
+        </p:nvPicPr>
+        <p:blipFill>
+          <a:blip r:embed="rId3">
+            <a:extLst>
+              <a:ext uri="{96DAC541-7B7A-43D3-8B79-37D633B846F1}">
+                <asvg:svgBlip xmlns:asvg="http://schemas.microsoft.com/office/drawing/2016/SVG/main" r:embed="rId4"/>
+              </a:ext>
+            </a:extLst>
+          </a:blip>
+          <a:stretch>
+            <a:fillRect/>
+          </a:stretch>
+        </p:blipFill>
+        <p:spPr>
+          <a:xfrm>
+            <a:off x="4456176" y="2011680"/>
+            <a:ext cx="347472" cy="347472"/>
+          </a:xfrm>
+          <a:prstGeom prst="rect">
+            <a:avLst/>
+          </a:prstGeom>
+        </p:spPr>
+      </p:pic>
+      <p:sp>
+        <p:nvSpPr>
+          <p:cNvPr id="13" name="Text 9"/>
+          <p:cNvSpPr/>
+          <p:nvPr/>
+        </p:nvSpPr>
+        <p:spPr>
+          <a:xfrm>
+            <a:off x="4895088" y="1938528"/>
+            <a:ext cx="2837688" cy="777240"/>
+          </a:xfrm>
+          <a:prstGeom prst="rect">
+            <a:avLst/>
+          </a:prstGeom>
+          <a:noFill/>
+          <a:ln/>
+        </p:spPr>
+        <p:txBody>
+          <a:bodyPr wrap="square" rtlCol="0" anchor="ctr"/>
+          <a:lstStyle/>
+          <a:p>
+            <a:pPr indent="0" marL="0">
+              <a:lnSpc>
+                <a:spcPct val="100000"/>
+              </a:lnSpc>
+              <a:buNone/>
+            </a:pPr>
+            <a:r>
+              <a:rPr lang="en-US" sz="2000" b="1" dirty="0">
+                <a:solidFill>
+                  <a:srgbClr val="002050"/>
+                </a:solidFill>
+                <a:latin typeface="Aptos Display" pitchFamily="34" charset="0"/>
+                <a:ea typeface="Aptos Display" pitchFamily="34" charset="-122"/>
+                <a:cs typeface="Aptos Display" pitchFamily="34" charset="-120"/>
+              </a:rPr>
+              <a:t>Questioning session</a:t>
+            </a:r>
+            <a:endParaRPr lang="en-US" sz="2000" dirty="0"/>
+          </a:p>
+        </p:txBody>
+      </p:sp>
+      <p:sp>
+        <p:nvSpPr>
+          <p:cNvPr id="14" name="Text 10"/>
+          <p:cNvSpPr/>
+          <p:nvPr/>
+        </p:nvSpPr>
+        <p:spPr>
+          <a:xfrm>
+            <a:off x="4456176" y="2761488"/>
+            <a:ext cx="3276600" cy="1591056"/>
+          </a:xfrm>
+          <a:prstGeom prst="rect">
+            <a:avLst/>
+          </a:prstGeom>
+          <a:noFill/>
+          <a:ln/>
+        </p:spPr>
+        <p:txBody>
+          <a:bodyPr wrap="square" rtlCol="0" anchor="t"/>
+          <a:lstStyle/>
+          <a:p>
+            <a:pPr indent="0" marL="0">
+              <a:lnSpc>
+                <a:spcPct val="110000"/>
+              </a:lnSpc>
+              <a:buNone/>
+            </a:pPr>
+            <a:r>
+              <a:rPr lang="en-US" sz="1800" dirty="0">
+                <a:solidFill>
+                  <a:srgbClr val="6B7280"/>
+                </a:solidFill>
+                <a:latin typeface="Aptos" pitchFamily="34" charset="0"/>
+                <a:ea typeface="Aptos" pitchFamily="34" charset="-122"/>
+                <a:cs typeface="Aptos" pitchFamily="34" charset="-120"/>
+              </a:rPr>
+              <a:t>“Chairing a technical practitioners meeting” — typed answers, AI-marked.</a:t>
+            </a:r>
+            <a:endParaRPr lang="en-US" sz="1800" dirty="0"/>
+          </a:p>
+        </p:txBody>
+      </p:sp>
+      <p:sp>
+        <p:nvSpPr>
+          <p:cNvPr id="15" name="Shape 11"/>
+          <p:cNvSpPr/>
+          <p:nvPr/>
+        </p:nvSpPr>
+        <p:spPr>
+          <a:xfrm>
+            <a:off x="8080248" y="1828800"/>
+            <a:ext cx="3605784" cy="2651760"/>
+          </a:xfrm>
+          <a:prstGeom prst="roundRect">
+            <a:avLst>
+              <a:gd name="adj" fmla="val 3103"/>
+            </a:avLst>
+          </a:prstGeom>
+          <a:solidFill>
+            <a:srgbClr val="FFFFFF"/>
+          </a:solidFill>
+          <a:ln w="12700">
+            <a:solidFill>
+              <a:srgbClr val="D5E3F2"/>
+            </a:solidFill>
+            <a:prstDash val="solid"/>
+          </a:ln>
+          <a:effectLst>
+            <a:outerShdw sx="100000" sy="100000" kx="0" ky="0" algn="bl" rotWithShape="0" blurRad="88900" dist="25400" dir="5400000">
+              <a:srgbClr val="9AB4CC">
+                <a:alpha val="30000"/>
+              </a:srgbClr>
+            </a:outerShdw>
+          </a:effectLst>
+        </p:spPr>
+      </p:sp>
+      <p:pic>
+        <p:nvPicPr>
+          <p:cNvPr id="16" name="Image 2" descr="preencoded.png">    </p:cNvPr>
+          <p:cNvPicPr>
+            <a:picLocks noChangeAspect="1"/>
+          </p:cNvPicPr>
+          <p:nvPr/>
+        </p:nvPicPr>
+        <p:blipFill>
+          <a:blip r:embed="rId5">
+            <a:extLst>
+              <a:ext uri="{96DAC541-7B7A-43D3-8B79-37D633B846F1}">
+                <asvg:svgBlip xmlns:asvg="http://schemas.microsoft.com/office/drawing/2016/SVG/main" r:embed="rId6"/>
+              </a:ext>
+            </a:extLst>
+          </a:blip>
+          <a:stretch>
+            <a:fillRect/>
+          </a:stretch>
+        </p:blipFill>
+        <p:spPr>
+          <a:xfrm>
+            <a:off x="8244840" y="2011680"/>
+            <a:ext cx="347472" cy="347472"/>
+          </a:xfrm>
+          <a:prstGeom prst="rect">
+            <a:avLst/>
+          </a:prstGeom>
+        </p:spPr>
+      </p:pic>
+      <p:sp>
+        <p:nvSpPr>
+          <p:cNvPr id="17" name="Text 12"/>
+          <p:cNvSpPr/>
+          <p:nvPr/>
+        </p:nvSpPr>
+        <p:spPr>
+          <a:xfrm>
+            <a:off x="8683752" y="1938528"/>
+            <a:ext cx="2837688" cy="777240"/>
+          </a:xfrm>
+          <a:prstGeom prst="rect">
+            <a:avLst/>
+          </a:prstGeom>
+          <a:noFill/>
+          <a:ln/>
+        </p:spPr>
+        <p:txBody>
+          <a:bodyPr wrap="square" rtlCol="0" anchor="ctr"/>
+          <a:lstStyle/>
+          <a:p>
+            <a:pPr indent="0" marL="0">
+              <a:lnSpc>
+                <a:spcPct val="100000"/>
+              </a:lnSpc>
+              <a:buNone/>
+            </a:pPr>
+            <a:r>
+              <a:rPr lang="en-US" sz="2000" b="1" dirty="0">
+                <a:solidFill>
+                  <a:srgbClr val="002050"/>
+                </a:solidFill>
+                <a:latin typeface="Aptos Display" pitchFamily="34" charset="0"/>
+                <a:ea typeface="Aptos Display" pitchFamily="34" charset="-122"/>
+                <a:cs typeface="Aptos Display" pitchFamily="34" charset="-120"/>
+              </a:rPr>
+              <a:t>Quiz 3</a:t>
+            </a:r>
+            <a:endParaRPr lang="en-US" sz="2000" dirty="0"/>
+          </a:p>
+        </p:txBody>
+      </p:sp>
+      <p:sp>
+        <p:nvSpPr>
+          <p:cNvPr id="18" name="Text 13"/>
+          <p:cNvSpPr/>
+          <p:nvPr/>
+        </p:nvSpPr>
+        <p:spPr>
+          <a:xfrm>
+            <a:off x="8244840" y="2761488"/>
+            <a:ext cx="3276600" cy="1591056"/>
+          </a:xfrm>
+          <a:prstGeom prst="rect">
+            <a:avLst/>
+          </a:prstGeom>
+          <a:noFill/>
+          <a:ln/>
+        </p:spPr>
+        <p:txBody>
+          <a:bodyPr wrap="square" rtlCol="0" anchor="t"/>
+          <a:lstStyle/>
+          <a:p>
+            <a:pPr indent="0" marL="0">
+              <a:lnSpc>
+                <a:spcPct val="110000"/>
+              </a:lnSpc>
+              <a:buNone/>
+            </a:pPr>
+            <a:r>
+              <a:rPr lang="en-US" sz="1800" dirty="0">
+                <a:solidFill>
+                  <a:srgbClr val="6B7280"/>
+                </a:solidFill>
+                <a:latin typeface="Aptos" pitchFamily="34" charset="0"/>
+                <a:ea typeface="Aptos" pitchFamily="34" charset="-122"/>
+                <a:cs typeface="Aptos" pitchFamily="34" charset="-120"/>
+              </a:rPr>
+              <a:t>Preparing and chairing the meeting. 80%+ is competent.</a:t>
+            </a:r>
+            <a:endParaRPr lang="en-US" sz="1800" dirty="0"/>
+          </a:p>
+        </p:txBody>
+      </p:sp>
+    </p:spTree>
+  </p:cSld>
+  <p:clrMapOvr>
+    <a:masterClrMapping/>
+  </p:clrMapOvr>
+</p:sld>
+</file>
+
+<file path=ppt/slides/slide11.xml><?xml version="1.0" encoding="utf-8"?>
+<p:sld xmlns:a="http://schemas.openxmlformats.org/drawingml/2006/main" xmlns:r="http://schemas.openxmlformats.org/officeDocument/2006/relationships" xmlns:p="http://schemas.openxmlformats.org/presentationml/2006/main">
+  <p:cSld name="Slide 11">
+    <p:bg>
+      <p:bgPr>
+        <a:solidFill>
+          <a:srgbClr val="002050"/>
+        </a:solidFill>
+      </p:bgPr>
+    </p:bg>
+    <p:spTree>
+      <p:nvGrpSpPr>
+        <p:cNvPr id="1" name=""/>
+        <p:cNvGrpSpPr/>
+        <p:nvPr/>
+      </p:nvGrpSpPr>
+      <p:grpSpPr>
+        <a:xfrm>
+          <a:off x="0" y="0"/>
+          <a:ext cx="0" cy="0"/>
+          <a:chOff x="0" y="0"/>
+          <a:chExt cx="0" cy="0"/>
+        </a:xfrm>
+      </p:grpSpPr>
+      <p:sp>
+        <p:nvSpPr>
+          <p:cNvPr id="2" name="Text 0"/>
+          <p:cNvSpPr/>
+          <p:nvPr/>
+        </p:nvSpPr>
+        <p:spPr>
+          <a:xfrm>
+            <a:off x="502920" y="6400800"/>
+            <a:ext cx="10268712" cy="347472"/>
+          </a:xfrm>
+          <a:prstGeom prst="rect">
+            <a:avLst/>
+          </a:prstGeom>
+          <a:noFill/>
+          <a:ln/>
+        </p:spPr>
+        <p:txBody>
+          <a:bodyPr wrap="square" rtlCol="0" anchor="ctr"/>
+          <a:lstStyle/>
+          <a:p>
+            <a:pPr indent="0" marL="0">
+              <a:buNone/>
+            </a:pPr>
+            <a:r>
+              <a:rPr lang="en-US" sz="1800" dirty="0">
+                <a:solidFill>
+                  <a:srgbClr val="6B7280"/>
+                </a:solidFill>
+                <a:latin typeface="Aptos" pitchFamily="34" charset="0"/>
+                <a:ea typeface="Aptos" pitchFamily="34" charset="-122"/>
+                <a:cs typeface="Aptos" pitchFamily="34" charset="-120"/>
+              </a:rPr>
+              <a:t>US 114051 · Conduct a technical practitioners meeting · NQF 5 · 4 credits</a:t>
+            </a:r>
+            <a:endParaRPr lang="en-US" sz="1800" dirty="0"/>
+          </a:p>
+        </p:txBody>
+      </p:sp>
+      <p:sp>
+        <p:nvSpPr>
+          <p:cNvPr id="3" name="Text 1"/>
+          <p:cNvSpPr/>
+          <p:nvPr/>
+        </p:nvSpPr>
+        <p:spPr>
+          <a:xfrm>
+            <a:off x="11045952" y="6400800"/>
+            <a:ext cx="640080" cy="347472"/>
+          </a:xfrm>
+          <a:prstGeom prst="rect">
+            <a:avLst/>
+          </a:prstGeom>
+          <a:noFill/>
+          <a:ln/>
+        </p:spPr>
+        <p:txBody>
+          <a:bodyPr wrap="square" rtlCol="0" anchor="ctr"/>
+          <a:lstStyle/>
+          <a:p>
+            <a:pPr algn="r" indent="0" marL="0">
+              <a:buNone/>
+            </a:pPr>
+            <a:r>
+              <a:rPr lang="en-US" sz="1800" dirty="0">
+                <a:solidFill>
+                  <a:srgbClr val="6B7280"/>
+                </a:solidFill>
+                <a:latin typeface="Aptos" pitchFamily="34" charset="0"/>
+                <a:ea typeface="Aptos" pitchFamily="34" charset="-122"/>
+                <a:cs typeface="Aptos" pitchFamily="34" charset="-120"/>
+              </a:rPr>
+              <a:t>11</a:t>
+            </a:r>
+            <a:endParaRPr lang="en-US" sz="1800" dirty="0"/>
+          </a:p>
+        </p:txBody>
+      </p:sp>
+      <p:sp>
+        <p:nvSpPr>
+          <p:cNvPr id="4" name="Shape 2"/>
+          <p:cNvSpPr/>
+          <p:nvPr/>
+        </p:nvSpPr>
+        <p:spPr>
+          <a:xfrm>
+            <a:off x="0" y="0"/>
+            <a:ext cx="12188952" cy="82296"/>
+          </a:xfrm>
+          <a:prstGeom prst="rect">
+            <a:avLst/>
+          </a:prstGeom>
+          <a:solidFill>
+            <a:srgbClr val="0F6CBD"/>
+          </a:solidFill>
+          <a:ln/>
+        </p:spPr>
+      </p:sp>
+      <p:sp>
+        <p:nvSpPr>
+          <p:cNvPr id="5" name="Shape 3"/>
+          <p:cNvSpPr/>
+          <p:nvPr/>
+        </p:nvSpPr>
+        <p:spPr>
+          <a:xfrm>
+            <a:off x="0" y="0"/>
+            <a:ext cx="12188952" cy="109728"/>
+          </a:xfrm>
+          <a:prstGeom prst="rect">
+            <a:avLst/>
+          </a:prstGeom>
+          <a:solidFill>
+            <a:srgbClr val="0F6CBD"/>
+          </a:solidFill>
+          <a:ln/>
+        </p:spPr>
+      </p:sp>
+      <p:pic>
+        <p:nvPicPr>
+          <p:cNvPr id="6" name="Image 0" descr="preencoded.png">    </p:cNvPr>
+          <p:cNvPicPr>
+            <a:picLocks noChangeAspect="1"/>
+          </p:cNvPicPr>
+          <p:nvPr/>
+        </p:nvPicPr>
+        <p:blipFill>
+          <a:blip r:embed="rId1">
+            <a:extLst>
+              <a:ext uri="{96DAC541-7B7A-43D3-8B79-37D633B846F1}">
+                <asvg:svgBlip xmlns:asvg="http://schemas.microsoft.com/office/drawing/2016/SVG/main" r:embed="rId2"/>
+              </a:ext>
+            </a:extLst>
+          </a:blip>
+          <a:stretch>
+            <a:fillRect/>
+          </a:stretch>
+        </p:blipFill>
+        <p:spPr>
+          <a:xfrm>
+            <a:off x="502920" y="1463040"/>
+            <a:ext cx="640080" cy="640080"/>
+          </a:xfrm>
+          <a:prstGeom prst="rect">
+            <a:avLst/>
+          </a:prstGeom>
+        </p:spPr>
+      </p:pic>
+      <p:sp>
+        <p:nvSpPr>
+          <p:cNvPr id="7" name="Text 4"/>
+          <p:cNvSpPr/>
+          <p:nvPr/>
+        </p:nvSpPr>
+        <p:spPr>
+          <a:xfrm>
+            <a:off x="502920" y="2240280"/>
+            <a:ext cx="11183112" cy="1280160"/>
+          </a:xfrm>
+          <a:prstGeom prst="rect">
+            <a:avLst/>
+          </a:prstGeom>
+          <a:noFill/>
+          <a:ln/>
+        </p:spPr>
+        <p:txBody>
+          <a:bodyPr wrap="square" rtlCol="0" anchor="ctr"/>
+          <a:lstStyle/>
+          <a:p>
+            <a:pPr indent="0" marL="0">
+              <a:buNone/>
+            </a:pPr>
+            <a:r>
+              <a:rPr lang="en-US" sz="3600" b="1" dirty="0">
+                <a:solidFill>
+                  <a:srgbClr val="FFFFFF"/>
+                </a:solidFill>
+                <a:latin typeface="Aptos Display" pitchFamily="34" charset="0"/>
+                <a:ea typeface="Aptos Display" pitchFamily="34" charset="-122"/>
+                <a:cs typeface="Aptos Display" pitchFamily="34" charset="-120"/>
+              </a:rPr>
+              <a:t>Run the meeting — don't let the meeting run you.</a:t>
+            </a:r>
+            <a:endParaRPr lang="en-US" sz="3600" dirty="0"/>
+          </a:p>
+        </p:txBody>
+      </p:sp>
+      <p:sp>
+        <p:nvSpPr>
+          <p:cNvPr id="8" name="Text 5"/>
+          <p:cNvSpPr/>
+          <p:nvPr/>
+        </p:nvSpPr>
+        <p:spPr>
+          <a:xfrm>
+            <a:off x="502920" y="3611880"/>
+            <a:ext cx="10058400" cy="1280160"/>
+          </a:xfrm>
+          <a:prstGeom prst="rect">
+            <a:avLst/>
+          </a:prstGeom>
+          <a:noFill/>
+          <a:ln/>
+        </p:spPr>
+        <p:txBody>
+          <a:bodyPr wrap="square" rtlCol="0" anchor="ctr"/>
+          <a:lstStyle/>
+          <a:p>
+            <a:pPr indent="0" marL="0">
+              <a:lnSpc>
+                <a:spcPct val="125000"/>
+              </a:lnSpc>
+              <a:buNone/>
+            </a:pPr>
+            <a:r>
+              <a:rPr lang="en-US" sz="1800" dirty="0">
+                <a:solidFill>
+                  <a:srgbClr val="B9D6F2"/>
+                </a:solidFill>
+                <a:latin typeface="Aptos" pitchFamily="34" charset="0"/>
+                <a:ea typeface="Aptos" pitchFamily="34" charset="-122"/>
+                <a:cs typeface="Aptos" pitchFamily="34" charset="-120"/>
+              </a:rPr>
+              <a:t>Rules agreed with the members » the agenda followed step by step » everyone heard, no one dominating » difficult behaviour managed with skill » decisions that are clear, accurate, time-framed — and a meeting that ends on time.</a:t>
+            </a:r>
+            <a:endParaRPr lang="en-US" sz="1800" dirty="0"/>
+          </a:p>
+        </p:txBody>
+      </p:sp>
+      <p:sp>
+        <p:nvSpPr>
+          <p:cNvPr id="9" name="Text 6"/>
+          <p:cNvSpPr/>
+          <p:nvPr/>
+        </p:nvSpPr>
+        <p:spPr>
+          <a:xfrm>
+            <a:off x="502920" y="6291072"/>
+            <a:ext cx="11183112" cy="365760"/>
+          </a:xfrm>
+          <a:prstGeom prst="rect">
+            <a:avLst/>
+          </a:prstGeom>
+          <a:noFill/>
+          <a:ln/>
+        </p:spPr>
+        <p:txBody>
+          <a:bodyPr wrap="square" rtlCol="0" anchor="ctr"/>
+          <a:lstStyle/>
+          <a:p>
+            <a:pPr indent="0" marL="0">
+              <a:buNone/>
+            </a:pPr>
+            <a:r>
+              <a:rPr lang="en-US" sz="1800" dirty="0">
+                <a:solidFill>
+                  <a:srgbClr val="6E93BC"/>
+                </a:solidFill>
+                <a:latin typeface="Aptos" pitchFamily="34" charset="0"/>
+                <a:ea typeface="Aptos" pitchFamily="34" charset="-122"/>
+                <a:cs typeface="Aptos" pitchFamily="34" charset="-120"/>
+              </a:rPr>
+              <a:t>US 114051 · National Certificate: IT — System Support · SAQA ID 48573 · ITSS Learn</a:t>
             </a:r>
             <a:endParaRPr lang="en-US" sz="1800" dirty="0"/>
           </a:p>
@@ -2379,7 +3687,7 @@
                 <a:ea typeface="Aptos" pitchFamily="34" charset="-122"/>
                 <a:cs typeface="Aptos" pitchFamily="34" charset="-120"/>
               </a:rPr>
-              <a:t>Rules and guidelines agreed in conjunction with the meeting members.</a:t>
+              <a:t>The chair and members agree on rules and guidelines on behaviour.</a:t>
             </a:r>
             <a:endParaRPr lang="en-US" sz="1800" dirty="0"/>
           </a:p>
@@ -2527,7 +3835,7 @@
                 <a:ea typeface="Aptos" pitchFamily="34" charset="-122"/>
                 <a:cs typeface="Aptos" pitchFamily="34" charset="-120"/>
               </a:rPr>
-              <a:t>The meeting conventions the members agreed are applied consistently.</a:t>
+              <a:t>Agreed conventions applied throughout, per the standing procedures of the organisation.</a:t>
             </a:r>
             <a:endParaRPr lang="en-US" sz="1800" dirty="0"/>
           </a:p>
@@ -2823,7 +4131,7 @@
                 <a:ea typeface="Aptos" pitchFamily="34" charset="-122"/>
                 <a:cs typeface="Aptos" pitchFamily="34" charset="-120"/>
               </a:rPr>
-              <a:t>Active participation by all members; conflict is minimised.</a:t>
+              <a:t>Active participation by all members to avoid or minimise conflict.</a:t>
             </a:r>
             <a:endParaRPr lang="en-US" sz="1800" dirty="0"/>
           </a:p>
@@ -2971,7 +4279,7 @@
                 <a:ea typeface="Aptos" pitchFamily="34" charset="-122"/>
                 <a:cs typeface="Aptos" pitchFamily="34" charset="-120"/>
               </a:rPr>
-              <a:t>Topics prioritised; discussion time allocated per item.</a:t>
+              <a:t>Topics prioritised; discussion time allocated by importance, urgency and complexity.</a:t>
             </a:r>
             <a:endParaRPr lang="en-US" sz="1800" dirty="0"/>
           </a:p>
@@ -3119,7 +4427,7 @@
                 <a:ea typeface="Aptos" pitchFamily="34" charset="-122"/>
                 <a:cs typeface="Aptos" pitchFamily="34" charset="-120"/>
               </a:rPr>
-              <a:t>Decisions are clear, accurate and include timeframes.</a:t>
+              <a:t>Decisions clear, accurate, time-framed and within the meeting's mandate.</a:t>
             </a:r>
             <a:endParaRPr lang="en-US" sz="1800" dirty="0"/>
           </a:p>
@@ -3327,7 +4635,7 @@
                 <a:ea typeface="Aptos Display" pitchFamily="34" charset="-122"/>
                 <a:cs typeface="Aptos Display" pitchFamily="34" charset="-120"/>
               </a:rPr>
-              <a:t>Open with rules the members own</a:t>
+              <a:t>The chairperson — the most important person in the room</a:t>
             </a:r>
             <a:endParaRPr lang="en-US" sz="3000" dirty="0"/>
           </a:p>
@@ -3335,87 +4643,14 @@
       </p:sp>
       <p:sp>
         <p:nvSpPr>
-          <p:cNvPr id="7" name="Shape 5"/>
+          <p:cNvPr id="7" name="Text 5"/>
           <p:cNvSpPr/>
           <p:nvPr/>
         </p:nvSpPr>
         <p:spPr>
           <a:xfrm>
             <a:off x="502920" y="1554480"/>
-            <a:ext cx="5454396" cy="4480560"/>
-          </a:xfrm>
-          <a:prstGeom prst="roundRect">
-            <a:avLst>
-              <a:gd name="adj" fmla="val 1837"/>
-            </a:avLst>
-          </a:prstGeom>
-          <a:solidFill>
-            <a:srgbClr val="FFFFFF"/>
-          </a:solidFill>
-          <a:ln w="12700">
-            <a:solidFill>
-              <a:srgbClr val="D5E3F2"/>
-            </a:solidFill>
-            <a:prstDash val="solid"/>
-          </a:ln>
-          <a:effectLst>
-            <a:outerShdw sx="100000" sy="100000" kx="0" ky="0" algn="bl" rotWithShape="0" blurRad="88900" dist="25400" dir="5400000">
-              <a:srgbClr val="9AB4CC">
-                <a:alpha val="30000"/>
-              </a:srgbClr>
-            </a:outerShdw>
-          </a:effectLst>
-        </p:spPr>
-      </p:sp>
-      <p:sp>
-        <p:nvSpPr>
-          <p:cNvPr id="8" name="Text 6"/>
-          <p:cNvSpPr/>
-          <p:nvPr/>
-        </p:nvSpPr>
-        <p:spPr>
-          <a:xfrm>
-            <a:off x="731520" y="1737360"/>
-            <a:ext cx="4997196" cy="329184"/>
-          </a:xfrm>
-          <a:prstGeom prst="rect">
-            <a:avLst/>
-          </a:prstGeom>
-          <a:noFill/>
-          <a:ln/>
-        </p:spPr>
-        <p:txBody>
-          <a:bodyPr wrap="square" rtlCol="0" anchor="ctr"/>
-          <a:lstStyle/>
-          <a:p>
-            <a:pPr indent="0" marL="0">
-              <a:buNone/>
-            </a:pPr>
-            <a:r>
-              <a:rPr lang="en-US" sz="1800" b="1" spc="100" kern="0" dirty="0">
-                <a:solidFill>
-                  <a:srgbClr val="0F6CBD"/>
-                </a:solidFill>
-                <a:latin typeface="Aptos" pitchFamily="34" charset="0"/>
-                <a:ea typeface="Aptos" pitchFamily="34" charset="-122"/>
-                <a:cs typeface="Aptos" pitchFamily="34" charset="-120"/>
-              </a:rPr>
-              <a:t>ESTABLISH RULES &amp; GUIDELINES</a:t>
-            </a:r>
-            <a:endParaRPr lang="en-US" sz="1800" dirty="0"/>
-          </a:p>
-        </p:txBody>
-      </p:sp>
-      <p:sp>
-        <p:nvSpPr>
-          <p:cNvPr id="9" name="Text 7"/>
-          <p:cNvSpPr/>
-          <p:nvPr/>
-        </p:nvSpPr>
-        <p:spPr>
-          <a:xfrm>
-            <a:off x="731520" y="2103120"/>
-            <a:ext cx="4997196" cy="3749040"/>
+            <a:ext cx="11183112" cy="4572000"/>
           </a:xfrm>
           <a:prstGeom prst="rect">
             <a:avLst/>
@@ -3446,7 +4681,7 @@
                 <a:ea typeface="Aptos" pitchFamily="34" charset="-122"/>
                 <a:cs typeface="Aptos" pitchFamily="34" charset="-120"/>
               </a:rPr>
-              <a:t>Agree the rules in conjunction with the members at the start</a:t>
+              <a:t>The chairperson sets the pace, keeps people on the topics, ensures democratic decisions are taken and that everyone is on board with them.</a:t>
             </a:r>
             <a:endParaRPr lang="en-US" sz="1800" dirty="0"/>
           </a:p>
@@ -3470,7 +4705,7 @@
                 <a:ea typeface="Aptos" pitchFamily="34" charset="-122"/>
                 <a:cs typeface="Aptos" pitchFamily="34" charset="-120"/>
               </a:rPr>
-              <a:t>How to get the floor, how long contributions may run</a:t>
+              <a:t>Chairing is a great skill: teach members to chair and rotate the job so more people practise it — but use an experienced chairperson for important meetings.</a:t>
             </a:r>
             <a:endParaRPr lang="en-US" sz="1800" dirty="0"/>
           </a:p>
@@ -3494,7 +4729,7 @@
                 <a:ea typeface="Aptos" pitchFamily="34" charset="-122"/>
                 <a:cs typeface="Aptos" pitchFamily="34" charset="-120"/>
               </a:rPr>
-              <a:t>How decisions will be taken — and what is in scope</a:t>
+              <a:t>A good chairperson is an ACTIVE chairperson — not just keeping a list of speakers and letting them talk one after the other.</a:t>
             </a:r>
             <a:endParaRPr lang="en-US" sz="1800" dirty="0"/>
           </a:p>
@@ -3518,105 +4753,10 @@
                 <a:ea typeface="Aptos" pitchFamily="34" charset="-122"/>
                 <a:cs typeface="Aptos" pitchFamily="34" charset="-120"/>
               </a:rPr>
-              <a:t>Agreed rules create buy-in and prevent procedural disputes</a:t>
-            </a:r>
-            <a:endParaRPr lang="en-US" sz="1800" dirty="0"/>
-          </a:p>
-        </p:txBody>
-      </p:sp>
-      <p:sp>
-        <p:nvSpPr>
-          <p:cNvPr id="10" name="Shape 8"/>
-          <p:cNvSpPr/>
-          <p:nvPr/>
-        </p:nvSpPr>
-        <p:spPr>
-          <a:xfrm>
-            <a:off x="6231636" y="1554480"/>
-            <a:ext cx="5454396" cy="4480560"/>
-          </a:xfrm>
-          <a:prstGeom prst="roundRect">
-            <a:avLst>
-              <a:gd name="adj" fmla="val 1837"/>
-            </a:avLst>
-          </a:prstGeom>
-          <a:solidFill>
-            <a:srgbClr val="FFFFFF"/>
-          </a:solidFill>
-          <a:ln w="12700">
-            <a:solidFill>
-              <a:srgbClr val="D5E3F2"/>
-            </a:solidFill>
-            <a:prstDash val="solid"/>
-          </a:ln>
-          <a:effectLst>
-            <a:outerShdw sx="100000" sy="100000" kx="0" ky="0" algn="bl" rotWithShape="0" blurRad="88900" dist="25400" dir="5400000">
-              <a:srgbClr val="9AB4CC">
-                <a:alpha val="30000"/>
-              </a:srgbClr>
-            </a:outerShdw>
-          </a:effectLst>
-        </p:spPr>
-      </p:sp>
-      <p:sp>
-        <p:nvSpPr>
-          <p:cNvPr id="11" name="Text 9"/>
-          <p:cNvSpPr/>
-          <p:nvPr/>
-        </p:nvSpPr>
-        <p:spPr>
-          <a:xfrm>
-            <a:off x="6460236" y="1737360"/>
-            <a:ext cx="4997196" cy="329184"/>
-          </a:xfrm>
-          <a:prstGeom prst="rect">
-            <a:avLst/>
-          </a:prstGeom>
-          <a:noFill/>
-          <a:ln/>
-        </p:spPr>
-        <p:txBody>
-          <a:bodyPr wrap="square" rtlCol="0" anchor="ctr"/>
-          <a:lstStyle/>
-          <a:p>
-            <a:pPr indent="0" marL="0">
-              <a:buNone/>
-            </a:pPr>
-            <a:r>
-              <a:rPr lang="en-US" sz="1800" b="1" spc="100" kern="0" dirty="0">
-                <a:solidFill>
-                  <a:srgbClr val="0F6CBD"/>
-                </a:solidFill>
-                <a:latin typeface="Aptos" pitchFamily="34" charset="0"/>
-                <a:ea typeface="Aptos" pitchFamily="34" charset="-122"/>
-                <a:cs typeface="Aptos" pitchFamily="34" charset="-120"/>
-              </a:rPr>
-              <a:t>APPLY THE AGREED CONVENTIONS</a:t>
-            </a:r>
-            <a:endParaRPr lang="en-US" sz="1800" dirty="0"/>
-          </a:p>
-        </p:txBody>
-      </p:sp>
-      <p:sp>
-        <p:nvSpPr>
-          <p:cNvPr id="12" name="Text 10"/>
-          <p:cNvSpPr/>
-          <p:nvPr/>
-        </p:nvSpPr>
-        <p:spPr>
-          <a:xfrm>
-            <a:off x="6460236" y="2103120"/>
-            <a:ext cx="4997196" cy="3749040"/>
-          </a:xfrm>
-          <a:prstGeom prst="rect">
-            <a:avLst/>
-          </a:prstGeom>
-          <a:noFill/>
-          <a:ln/>
-        </p:spPr>
-        <p:txBody>
-          <a:bodyPr wrap="square" rtlCol="0" anchor="t"/>
-          <a:lstStyle/>
+              <a:t>Introduce each topic clearly and guide the discussion, especially when people start repeating points.</a:t>
+            </a:r>
+            <a:endParaRPr lang="en-US" sz="1800" dirty="0"/>
+          </a:p>
           <a:p>
             <a:pPr marL="203200" indent="-203200">
               <a:lnSpc>
@@ -3637,7 +4777,7 @@
                 <a:ea typeface="Aptos" pitchFamily="34" charset="-122"/>
                 <a:cs typeface="Aptos" pitchFamily="34" charset="-120"/>
               </a:rPr>
-              <a:t>Run motions through moving, seconding and amending</a:t>
+              <a:t>When a discussion throws up opposing views, summarise the different positions and propose a way forward: a vote, a further discussion at another date, or a compromise most people can agree with.</a:t>
             </a:r>
             <a:endParaRPr lang="en-US" sz="1800" dirty="0"/>
           </a:p>
@@ -3661,55 +4801,7 @@
                 <a:ea typeface="Aptos" pitchFamily="34" charset="-122"/>
                 <a:cs typeface="Aptos" pitchFamily="34" charset="-120"/>
               </a:rPr>
-              <a:t>Follow the published agenda item by item</a:t>
-            </a:r>
-            <a:endParaRPr lang="en-US" sz="1800" dirty="0"/>
-          </a:p>
-          <a:p>
-            <a:pPr marL="203200" indent="-203200">
-              <a:lnSpc>
-                <a:spcPct val="120000"/>
-              </a:lnSpc>
-              <a:spcAft>
-                <a:spcPts val="1000"/>
-              </a:spcAft>
-              <a:buSzPct val="100000"/>
-              <a:buChar char="•"/>
-            </a:pPr>
-            <a:r>
-              <a:rPr lang="en-US" sz="1800" dirty="0">
-                <a:solidFill>
-                  <a:srgbClr val="002050"/>
-                </a:solidFill>
-                <a:latin typeface="Aptos" pitchFamily="34" charset="0"/>
-                <a:ea typeface="Aptos" pitchFamily="34" charset="-122"/>
-                <a:cs typeface="Aptos" pitchFamily="34" charset="-120"/>
-              </a:rPr>
-              <a:t>Park unrelated issues and keep an eye on the clock</a:t>
-            </a:r>
-            <a:endParaRPr lang="en-US" sz="1800" dirty="0"/>
-          </a:p>
-          <a:p>
-            <a:pPr marL="203200" indent="-203200">
-              <a:lnSpc>
-                <a:spcPct val="120000"/>
-              </a:lnSpc>
-              <a:spcAft>
-                <a:spcPts val="1000"/>
-              </a:spcAft>
-              <a:buSzPct val="100000"/>
-              <a:buChar char="•"/>
-            </a:pPr>
-            <a:r>
-              <a:rPr lang="en-US" sz="1800" dirty="0">
-                <a:solidFill>
-                  <a:srgbClr val="002050"/>
-                </a:solidFill>
-                <a:latin typeface="Aptos" pitchFamily="34" charset="0"/>
-                <a:ea typeface="Aptos" pitchFamily="34" charset="-122"/>
-                <a:cs typeface="Aptos" pitchFamily="34" charset="-120"/>
-              </a:rPr>
-              <a:t>Apply the conventions consistently — the same rules for everyone</a:t>
+              <a:t>Ask the meeting to agree on the way forward — and apologise to those who still wanted to speak.</a:t>
             </a:r>
             <a:endParaRPr lang="en-US" sz="1800" dirty="0"/>
           </a:p>
@@ -3917,7 +5009,7 @@
                 <a:ea typeface="Aptos Display" pitchFamily="34" charset="-122"/>
                 <a:cs typeface="Aptos Display" pitchFamily="34" charset="-120"/>
               </a:rPr>
-              <a:t>Participation, priorities and decisions</a:t>
+              <a:t>Open with rules the members own</a:t>
             </a:r>
             <a:endParaRPr lang="en-US" sz="3000" dirty="0"/>
           </a:p>
@@ -3925,14 +5017,87 @@
       </p:sp>
       <p:sp>
         <p:nvSpPr>
-          <p:cNvPr id="7" name="Text 5"/>
-          <p:cNvSpPr/>
-          <p:nvPr/>
-        </p:nvSpPr>
-        <p:spPr>
-          <a:xfrm>
-            <a:off x="502920" y="1600200"/>
-            <a:ext cx="11183112" cy="4572000"/>
+          <p:cNvPr id="7" name="Shape 5"/>
+          <p:cNvSpPr/>
+          <p:nvPr/>
+        </p:nvSpPr>
+        <p:spPr>
+          <a:xfrm>
+            <a:off x="502920" y="1554480"/>
+            <a:ext cx="5454396" cy="4480560"/>
+          </a:xfrm>
+          <a:prstGeom prst="roundRect">
+            <a:avLst>
+              <a:gd name="adj" fmla="val 1837"/>
+            </a:avLst>
+          </a:prstGeom>
+          <a:solidFill>
+            <a:srgbClr val="FFFFFF"/>
+          </a:solidFill>
+          <a:ln w="12700">
+            <a:solidFill>
+              <a:srgbClr val="D5E3F2"/>
+            </a:solidFill>
+            <a:prstDash val="solid"/>
+          </a:ln>
+          <a:effectLst>
+            <a:outerShdw sx="100000" sy="100000" kx="0" ky="0" algn="bl" rotWithShape="0" blurRad="88900" dist="25400" dir="5400000">
+              <a:srgbClr val="9AB4CC">
+                <a:alpha val="30000"/>
+              </a:srgbClr>
+            </a:outerShdw>
+          </a:effectLst>
+        </p:spPr>
+      </p:sp>
+      <p:sp>
+        <p:nvSpPr>
+          <p:cNvPr id="8" name="Text 6"/>
+          <p:cNvSpPr/>
+          <p:nvPr/>
+        </p:nvSpPr>
+        <p:spPr>
+          <a:xfrm>
+            <a:off x="731520" y="1737360"/>
+            <a:ext cx="4997196" cy="329184"/>
+          </a:xfrm>
+          <a:prstGeom prst="rect">
+            <a:avLst/>
+          </a:prstGeom>
+          <a:noFill/>
+          <a:ln/>
+        </p:spPr>
+        <p:txBody>
+          <a:bodyPr wrap="square" rtlCol="0" anchor="ctr"/>
+          <a:lstStyle/>
+          <a:p>
+            <a:pPr indent="0" marL="0">
+              <a:buNone/>
+            </a:pPr>
+            <a:r>
+              <a:rPr lang="en-US" sz="1800" b="1" spc="100" kern="0" dirty="0">
+                <a:solidFill>
+                  <a:srgbClr val="0F6CBD"/>
+                </a:solidFill>
+                <a:latin typeface="Aptos" pitchFamily="34" charset="0"/>
+                <a:ea typeface="Aptos" pitchFamily="34" charset="-122"/>
+                <a:cs typeface="Aptos" pitchFamily="34" charset="-120"/>
+              </a:rPr>
+              <a:t>ESTABLISH RULES &amp; GUIDELINES</a:t>
+            </a:r>
+            <a:endParaRPr lang="en-US" sz="1800" dirty="0"/>
+          </a:p>
+        </p:txBody>
+      </p:sp>
+      <p:sp>
+        <p:nvSpPr>
+          <p:cNvPr id="9" name="Text 7"/>
+          <p:cNvSpPr/>
+          <p:nvPr/>
+        </p:nvSpPr>
+        <p:spPr>
+          <a:xfrm>
+            <a:off x="731520" y="2103120"/>
+            <a:ext cx="4997196" cy="3749040"/>
           </a:xfrm>
           <a:prstGeom prst="rect">
             <a:avLst/>
@@ -3963,7 +5128,7 @@
                 <a:ea typeface="Aptos" pitchFamily="34" charset="-122"/>
                 <a:cs typeface="Aptos" pitchFamily="34" charset="-120"/>
               </a:rPr>
-              <a:t>Provide for active participation by ALL members — invite quiet members by name, use round-robin turns, acknowledge every contribution.</a:t>
+              <a:t>Agree the rules in conjunction with the members at the start</a:t>
             </a:r>
             <a:endParaRPr lang="en-US" sz="1800" dirty="0"/>
           </a:p>
@@ -3987,7 +5152,7 @@
                 <a:ea typeface="Aptos" pitchFamily="34" charset="-122"/>
                 <a:cs typeface="Aptos" pitchFamily="34" charset="-120"/>
               </a:rPr>
-              <a:t>Keep debate on the issue, not the person — that is how conflict is minimised.</a:t>
+              <a:t>Set a cut-off time everyone agrees on — it encourages people to be brief</a:t>
             </a:r>
             <a:endParaRPr lang="en-US" sz="1800" dirty="0"/>
           </a:p>
@@ -4011,7 +5176,7 @@
                 <a:ea typeface="Aptos" pitchFamily="34" charset="-122"/>
                 <a:cs typeface="Aptos" pitchFamily="34" charset="-120"/>
               </a:rPr>
-              <a:t>Prioritise topics and allocate discussion time according to importance, urgency and complexity.</a:t>
+              <a:t>How to get the floor, how long contributions may run</a:t>
             </a:r>
             <a:endParaRPr lang="en-US" sz="1800" dirty="0"/>
           </a:p>
@@ -4035,7 +5200,7 @@
                 <a:ea typeface="Aptos" pitchFamily="34" charset="-122"/>
                 <a:cs typeface="Aptos" pitchFamily="34" charset="-120"/>
               </a:rPr>
-              <a:t>Move minor items to the end of the agenda — or carry them over to the next meeting.</a:t>
+              <a:t>How decisions will be taken — and what is in scope</a:t>
             </a:r>
             <a:endParaRPr lang="en-US" sz="1800" dirty="0"/>
           </a:p>
@@ -4059,10 +5224,105 @@
                 <a:ea typeface="Aptos" pitchFamily="34" charset="-122"/>
                 <a:cs typeface="Aptos" pitchFamily="34" charset="-120"/>
               </a:rPr>
-              <a:t>Ensure agreed decisions are clear, accurate and include a time frame for action.</a:t>
-            </a:r>
-            <a:endParaRPr lang="en-US" sz="1800" dirty="0"/>
-          </a:p>
+              <a:t>Agreed rules create buy-in and prevent procedural disputes</a:t>
+            </a:r>
+            <a:endParaRPr lang="en-US" sz="1800" dirty="0"/>
+          </a:p>
+        </p:txBody>
+      </p:sp>
+      <p:sp>
+        <p:nvSpPr>
+          <p:cNvPr id="10" name="Shape 8"/>
+          <p:cNvSpPr/>
+          <p:nvPr/>
+        </p:nvSpPr>
+        <p:spPr>
+          <a:xfrm>
+            <a:off x="6231636" y="1554480"/>
+            <a:ext cx="5454396" cy="4480560"/>
+          </a:xfrm>
+          <a:prstGeom prst="roundRect">
+            <a:avLst>
+              <a:gd name="adj" fmla="val 1837"/>
+            </a:avLst>
+          </a:prstGeom>
+          <a:solidFill>
+            <a:srgbClr val="FFFFFF"/>
+          </a:solidFill>
+          <a:ln w="12700">
+            <a:solidFill>
+              <a:srgbClr val="D5E3F2"/>
+            </a:solidFill>
+            <a:prstDash val="solid"/>
+          </a:ln>
+          <a:effectLst>
+            <a:outerShdw sx="100000" sy="100000" kx="0" ky="0" algn="bl" rotWithShape="0" blurRad="88900" dist="25400" dir="5400000">
+              <a:srgbClr val="9AB4CC">
+                <a:alpha val="30000"/>
+              </a:srgbClr>
+            </a:outerShdw>
+          </a:effectLst>
+        </p:spPr>
+      </p:sp>
+      <p:sp>
+        <p:nvSpPr>
+          <p:cNvPr id="11" name="Text 9"/>
+          <p:cNvSpPr/>
+          <p:nvPr/>
+        </p:nvSpPr>
+        <p:spPr>
+          <a:xfrm>
+            <a:off x="6460236" y="1737360"/>
+            <a:ext cx="4997196" cy="329184"/>
+          </a:xfrm>
+          <a:prstGeom prst="rect">
+            <a:avLst/>
+          </a:prstGeom>
+          <a:noFill/>
+          <a:ln/>
+        </p:spPr>
+        <p:txBody>
+          <a:bodyPr wrap="square" rtlCol="0" anchor="ctr"/>
+          <a:lstStyle/>
+          <a:p>
+            <a:pPr indent="0" marL="0">
+              <a:buNone/>
+            </a:pPr>
+            <a:r>
+              <a:rPr lang="en-US" sz="1800" b="1" spc="100" kern="0" dirty="0">
+                <a:solidFill>
+                  <a:srgbClr val="0F6CBD"/>
+                </a:solidFill>
+                <a:latin typeface="Aptos" pitchFamily="34" charset="0"/>
+                <a:ea typeface="Aptos" pitchFamily="34" charset="-122"/>
+                <a:cs typeface="Aptos" pitchFamily="34" charset="-120"/>
+              </a:rPr>
+              <a:t>APPLY THE AGREED CONVENTIONS</a:t>
+            </a:r>
+            <a:endParaRPr lang="en-US" sz="1800" dirty="0"/>
+          </a:p>
+        </p:txBody>
+      </p:sp>
+      <p:sp>
+        <p:nvSpPr>
+          <p:cNvPr id="12" name="Text 10"/>
+          <p:cNvSpPr/>
+          <p:nvPr/>
+        </p:nvSpPr>
+        <p:spPr>
+          <a:xfrm>
+            <a:off x="6460236" y="2103120"/>
+            <a:ext cx="4997196" cy="3749040"/>
+          </a:xfrm>
+          <a:prstGeom prst="rect">
+            <a:avLst/>
+          </a:prstGeom>
+          <a:noFill/>
+          <a:ln/>
+        </p:spPr>
+        <p:txBody>
+          <a:bodyPr wrap="square" rtlCol="0" anchor="t"/>
+          <a:lstStyle/>
           <a:p>
             <a:pPr marL="203200" indent="-203200">
               <a:lnSpc>
@@ -4083,7 +5343,103 @@
                 <a:ea typeface="Aptos" pitchFamily="34" charset="-122"/>
                 <a:cs typeface="Aptos" pitchFamily="34" charset="-120"/>
               </a:rPr>
-              <a:t>Confirm each decision — and who owns it — with the members before moving on.</a:t>
+              <a:t>Run motions through moving, seconding and amending</a:t>
+            </a:r>
+            <a:endParaRPr lang="en-US" sz="1800" dirty="0"/>
+          </a:p>
+          <a:p>
+            <a:pPr marL="203200" indent="-203200">
+              <a:lnSpc>
+                <a:spcPct val="120000"/>
+              </a:lnSpc>
+              <a:spcAft>
+                <a:spcPts val="1000"/>
+              </a:spcAft>
+              <a:buSzPct val="100000"/>
+              <a:buChar char="•"/>
+            </a:pPr>
+            <a:r>
+              <a:rPr lang="en-US" sz="1800" dirty="0">
+                <a:solidFill>
+                  <a:srgbClr val="002050"/>
+                </a:solidFill>
+                <a:latin typeface="Aptos" pitchFamily="34" charset="0"/>
+                <a:ea typeface="Aptos" pitchFamily="34" charset="-122"/>
+                <a:cs typeface="Aptos" pitchFamily="34" charset="-120"/>
+              </a:rPr>
+              <a:t>Follow the published agenda item by item</a:t>
+            </a:r>
+            <a:endParaRPr lang="en-US" sz="1800" dirty="0"/>
+          </a:p>
+          <a:p>
+            <a:pPr marL="203200" indent="-203200">
+              <a:lnSpc>
+                <a:spcPct val="120000"/>
+              </a:lnSpc>
+              <a:spcAft>
+                <a:spcPts val="1000"/>
+              </a:spcAft>
+              <a:buSzPct val="100000"/>
+              <a:buChar char="•"/>
+            </a:pPr>
+            <a:r>
+              <a:rPr lang="en-US" sz="1800" dirty="0">
+                <a:solidFill>
+                  <a:srgbClr val="002050"/>
+                </a:solidFill>
+                <a:latin typeface="Aptos" pitchFamily="34" charset="0"/>
+                <a:ea typeface="Aptos" pitchFamily="34" charset="-122"/>
+                <a:cs typeface="Aptos" pitchFamily="34" charset="-120"/>
+              </a:rPr>
+              <a:t>Handle points of order, information and protection fairly</a:t>
+            </a:r>
+            <a:endParaRPr lang="en-US" sz="1800" dirty="0"/>
+          </a:p>
+          <a:p>
+            <a:pPr marL="203200" indent="-203200">
+              <a:lnSpc>
+                <a:spcPct val="120000"/>
+              </a:lnSpc>
+              <a:spcAft>
+                <a:spcPts val="1000"/>
+              </a:spcAft>
+              <a:buSzPct val="100000"/>
+              <a:buChar char="•"/>
+            </a:pPr>
+            <a:r>
+              <a:rPr lang="en-US" sz="1800" dirty="0">
+                <a:solidFill>
+                  <a:srgbClr val="002050"/>
+                </a:solidFill>
+                <a:latin typeface="Aptos" pitchFamily="34" charset="0"/>
+                <a:ea typeface="Aptos" pitchFamily="34" charset="-122"/>
+                <a:cs typeface="Aptos" pitchFamily="34" charset="-120"/>
+              </a:rPr>
+              <a:t>Park unrelated issues and keep an eye on the clock</a:t>
+            </a:r>
+            <a:endParaRPr lang="en-US" sz="1800" dirty="0"/>
+          </a:p>
+          <a:p>
+            <a:pPr marL="203200" indent="-203200">
+              <a:lnSpc>
+                <a:spcPct val="120000"/>
+              </a:lnSpc>
+              <a:spcAft>
+                <a:spcPts val="1000"/>
+              </a:spcAft>
+              <a:buSzPct val="100000"/>
+              <a:buChar char="•"/>
+            </a:pPr>
+            <a:r>
+              <a:rPr lang="en-US" sz="1800" dirty="0">
+                <a:solidFill>
+                  <a:srgbClr val="002050"/>
+                </a:solidFill>
+                <a:latin typeface="Aptos" pitchFamily="34" charset="0"/>
+                <a:ea typeface="Aptos" pitchFamily="34" charset="-122"/>
+                <a:cs typeface="Aptos" pitchFamily="34" charset="-120"/>
+              </a:rPr>
+              <a:t>The same rules for everyone — applied consistently</a:t>
             </a:r>
             <a:endParaRPr lang="en-US" sz="1800" dirty="0"/>
           </a:p>
@@ -4291,6 +5647,2272 @@
                 <a:ea typeface="Aptos Display" pitchFamily="34" charset="-122"/>
                 <a:cs typeface="Aptos Display" pitchFamily="34" charset="-120"/>
               </a:rPr>
+              <a:t>Running the agenda step by step</a:t>
+            </a:r>
+            <a:endParaRPr lang="en-US" sz="3000" dirty="0"/>
+          </a:p>
+        </p:txBody>
+      </p:sp>
+      <p:sp>
+        <p:nvSpPr>
+          <p:cNvPr id="7" name="Text 5"/>
+          <p:cNvSpPr/>
+          <p:nvPr/>
+        </p:nvSpPr>
+        <p:spPr>
+          <a:xfrm>
+            <a:off x="502920" y="1517904"/>
+            <a:ext cx="11183112" cy="4572000"/>
+          </a:xfrm>
+          <a:prstGeom prst="rect">
+            <a:avLst/>
+          </a:prstGeom>
+          <a:noFill/>
+          <a:ln/>
+        </p:spPr>
+        <p:txBody>
+          <a:bodyPr wrap="square" rtlCol="0" anchor="t"/>
+          <a:lstStyle/>
+          <a:p>
+            <a:pPr marL="203200" indent="-203200">
+              <a:lnSpc>
+                <a:spcPct val="120000"/>
+              </a:lnSpc>
+              <a:spcAft>
+                <a:spcPts val="1000"/>
+              </a:spcAft>
+              <a:buSzPct val="100000"/>
+              <a:buChar char="•"/>
+            </a:pPr>
+            <a:r>
+              <a:rPr lang="en-US" sz="1800" dirty="0">
+                <a:solidFill>
+                  <a:srgbClr val="002050"/>
+                </a:solidFill>
+                <a:latin typeface="Aptos" pitchFamily="34" charset="0"/>
+                <a:ea typeface="Aptos" pitchFamily="34" charset="-122"/>
+                <a:cs typeface="Aptos" pitchFamily="34" charset="-120"/>
+              </a:rPr>
+              <a:t>Open the meeting, welcome everyone and check who is present — record apologies, and send round an attendance register if the group is large.</a:t>
+            </a:r>
+            <a:endParaRPr lang="en-US" sz="1800" dirty="0"/>
+          </a:p>
+          <a:p>
+            <a:pPr marL="203200" indent="-203200">
+              <a:lnSpc>
+                <a:spcPct val="120000"/>
+              </a:lnSpc>
+              <a:spcAft>
+                <a:spcPts val="1000"/>
+              </a:spcAft>
+              <a:buSzPct val="100000"/>
+              <a:buChar char="•"/>
+            </a:pPr>
+            <a:r>
+              <a:rPr lang="en-US" sz="1800" dirty="0">
+                <a:solidFill>
+                  <a:srgbClr val="002050"/>
+                </a:solidFill>
+                <a:latin typeface="Aptos" pitchFamily="34" charset="0"/>
+                <a:ea typeface="Aptos" pitchFamily="34" charset="-122"/>
+                <a:cs typeface="Aptos" pitchFamily="34" charset="-120"/>
+              </a:rPr>
+              <a:t>Start on time, and make sure everyone knows who everyone else is — a quick go-round of names for newcomers.</a:t>
+            </a:r>
+            <a:endParaRPr lang="en-US" sz="1800" dirty="0"/>
+          </a:p>
+          <a:p>
+            <a:pPr marL="203200" indent="-203200">
+              <a:lnSpc>
+                <a:spcPct val="120000"/>
+              </a:lnSpc>
+              <a:spcAft>
+                <a:spcPts val="1000"/>
+              </a:spcAft>
+              <a:buSzPct val="100000"/>
+              <a:buChar char="•"/>
+            </a:pPr>
+            <a:r>
+              <a:rPr lang="en-US" sz="1800" dirty="0">
+                <a:solidFill>
+                  <a:srgbClr val="002050"/>
+                </a:solidFill>
+                <a:latin typeface="Aptos" pitchFamily="34" charset="0"/>
+                <a:ea typeface="Aptos" pitchFamily="34" charset="-122"/>
+                <a:cs typeface="Aptos" pitchFamily="34" charset="-120"/>
+              </a:rPr>
+              <a:t>Minutes: circulate or read the previous meeting's minutes, give members the chance to add what was left out, and adopt them as an accurate record.</a:t>
+            </a:r>
+            <a:endParaRPr lang="en-US" sz="1800" dirty="0"/>
+          </a:p>
+          <a:p>
+            <a:pPr marL="203200" indent="-203200">
+              <a:lnSpc>
+                <a:spcPct val="120000"/>
+              </a:lnSpc>
+              <a:spcAft>
+                <a:spcPts val="1000"/>
+              </a:spcAft>
+              <a:buSzPct val="100000"/>
+              <a:buChar char="•"/>
+            </a:pPr>
+            <a:r>
+              <a:rPr lang="en-US" sz="1800" dirty="0">
+                <a:solidFill>
+                  <a:srgbClr val="002050"/>
+                </a:solidFill>
+                <a:latin typeface="Aptos" pitchFamily="34" charset="0"/>
+                <a:ea typeface="Aptos" pitchFamily="34" charset="-122"/>
+                <a:cs typeface="Aptos" pitchFamily="34" charset="-120"/>
+              </a:rPr>
+              <a:t>Matters arising: work through the points from the previous minutes — tasks report back, deferred matters are discussed.</a:t>
+            </a:r>
+            <a:endParaRPr lang="en-US" sz="1800" dirty="0"/>
+          </a:p>
+          <a:p>
+            <a:pPr marL="203200" indent="-203200">
+              <a:lnSpc>
+                <a:spcPct val="120000"/>
+              </a:lnSpc>
+              <a:spcAft>
+                <a:spcPts val="1000"/>
+              </a:spcAft>
+              <a:buSzPct val="100000"/>
+              <a:buChar char="•"/>
+            </a:pPr>
+            <a:r>
+              <a:rPr lang="en-US" sz="1800" dirty="0">
+                <a:solidFill>
+                  <a:srgbClr val="002050"/>
+                </a:solidFill>
+                <a:latin typeface="Aptos" pitchFamily="34" charset="0"/>
+                <a:ea typeface="Aptos" pitchFamily="34" charset="-122"/>
+                <a:cs typeface="Aptos" pitchFamily="34" charset="-120"/>
+              </a:rPr>
+              <a:t>Correspondence: read out or list the letters received, with the chairperson suggesting action on each.</a:t>
+            </a:r>
+            <a:endParaRPr lang="en-US" sz="1800" dirty="0"/>
+          </a:p>
+          <a:p>
+            <a:pPr marL="203200" indent="-203200">
+              <a:lnSpc>
+                <a:spcPct val="120000"/>
+              </a:lnSpc>
+              <a:spcAft>
+                <a:spcPts val="1000"/>
+              </a:spcAft>
+              <a:buSzPct val="100000"/>
+              <a:buChar char="•"/>
+            </a:pPr>
+            <a:r>
+              <a:rPr lang="en-US" sz="1800" dirty="0">
+                <a:solidFill>
+                  <a:srgbClr val="002050"/>
+                </a:solidFill>
+                <a:latin typeface="Aptos" pitchFamily="34" charset="0"/>
+                <a:ea typeface="Aptos" pitchFamily="34" charset="-122"/>
+                <a:cs typeface="Aptos" pitchFamily="34" charset="-120"/>
+              </a:rPr>
+              <a:t>Other items: someone introduces each item as a discussion or a report — a report covers what was completed, the problems, and what still needs to be done.</a:t>
+            </a:r>
+            <a:endParaRPr lang="en-US" sz="1800" dirty="0"/>
+          </a:p>
+          <a:p>
+            <a:pPr marL="203200" indent="-203200">
+              <a:lnSpc>
+                <a:spcPct val="120000"/>
+              </a:lnSpc>
+              <a:spcAft>
+                <a:spcPts val="1000"/>
+              </a:spcAft>
+              <a:buSzPct val="100000"/>
+              <a:buChar char="•"/>
+            </a:pPr>
+            <a:r>
+              <a:rPr lang="en-US" sz="1800" dirty="0">
+                <a:solidFill>
+                  <a:srgbClr val="002050"/>
+                </a:solidFill>
+                <a:latin typeface="Aptos" pitchFamily="34" charset="0"/>
+                <a:ea typeface="Aptos" pitchFamily="34" charset="-122"/>
+                <a:cs typeface="Aptos" pitchFamily="34" charset="-120"/>
+              </a:rPr>
+              <a:t>For each discussion: examine the issue, get everyone's ideas, arrive at a decision, delegate responsibility, and follow up to ensure completion.</a:t>
+            </a:r>
+            <a:endParaRPr lang="en-US" sz="1800" dirty="0"/>
+          </a:p>
+        </p:txBody>
+      </p:sp>
+    </p:spTree>
+  </p:cSld>
+  <p:clrMapOvr>
+    <a:masterClrMapping/>
+  </p:clrMapOvr>
+</p:sld>
+</file>
+
+<file path=ppt/slides/slide6.xml><?xml version="1.0" encoding="utf-8"?>
+<p:sld xmlns:a="http://schemas.openxmlformats.org/drawingml/2006/main" xmlns:r="http://schemas.openxmlformats.org/officeDocument/2006/relationships" xmlns:p="http://schemas.openxmlformats.org/presentationml/2006/main">
+  <p:cSld name="Slide 6">
+    <p:bg>
+      <p:bgPr>
+        <a:solidFill>
+          <a:srgbClr val="FFFFFF"/>
+        </a:solidFill>
+      </p:bgPr>
+    </p:bg>
+    <p:spTree>
+      <p:nvGrpSpPr>
+        <p:cNvPr id="1" name=""/>
+        <p:cNvGrpSpPr/>
+        <p:nvPr/>
+      </p:nvGrpSpPr>
+      <p:grpSpPr>
+        <a:xfrm>
+          <a:off x="0" y="0"/>
+          <a:ext cx="0" cy="0"/>
+          <a:chOff x="0" y="0"/>
+          <a:chExt cx="0" cy="0"/>
+        </a:xfrm>
+      </p:grpSpPr>
+      <p:sp>
+        <p:nvSpPr>
+          <p:cNvPr id="2" name="Text 0"/>
+          <p:cNvSpPr/>
+          <p:nvPr/>
+        </p:nvSpPr>
+        <p:spPr>
+          <a:xfrm>
+            <a:off x="502920" y="6400800"/>
+            <a:ext cx="10268712" cy="347472"/>
+          </a:xfrm>
+          <a:prstGeom prst="rect">
+            <a:avLst/>
+          </a:prstGeom>
+          <a:noFill/>
+          <a:ln/>
+        </p:spPr>
+        <p:txBody>
+          <a:bodyPr wrap="square" rtlCol="0" anchor="ctr"/>
+          <a:lstStyle/>
+          <a:p>
+            <a:pPr indent="0" marL="0">
+              <a:buNone/>
+            </a:pPr>
+            <a:r>
+              <a:rPr lang="en-US" sz="1800" dirty="0">
+                <a:solidFill>
+                  <a:srgbClr val="6B7280"/>
+                </a:solidFill>
+                <a:latin typeface="Aptos" pitchFamily="34" charset="0"/>
+                <a:ea typeface="Aptos" pitchFamily="34" charset="-122"/>
+                <a:cs typeface="Aptos" pitchFamily="34" charset="-120"/>
+              </a:rPr>
+              <a:t>US 114051 · Conduct a technical practitioners meeting · NQF 5 · 4 credits</a:t>
+            </a:r>
+            <a:endParaRPr lang="en-US" sz="1800" dirty="0"/>
+          </a:p>
+        </p:txBody>
+      </p:sp>
+      <p:sp>
+        <p:nvSpPr>
+          <p:cNvPr id="3" name="Text 1"/>
+          <p:cNvSpPr/>
+          <p:nvPr/>
+        </p:nvSpPr>
+        <p:spPr>
+          <a:xfrm>
+            <a:off x="11045952" y="6400800"/>
+            <a:ext cx="640080" cy="347472"/>
+          </a:xfrm>
+          <a:prstGeom prst="rect">
+            <a:avLst/>
+          </a:prstGeom>
+          <a:noFill/>
+          <a:ln/>
+        </p:spPr>
+        <p:txBody>
+          <a:bodyPr wrap="square" rtlCol="0" anchor="ctr"/>
+          <a:lstStyle/>
+          <a:p>
+            <a:pPr algn="r" indent="0" marL="0">
+              <a:buNone/>
+            </a:pPr>
+            <a:r>
+              <a:rPr lang="en-US" sz="1800" dirty="0">
+                <a:solidFill>
+                  <a:srgbClr val="6B7280"/>
+                </a:solidFill>
+                <a:latin typeface="Aptos" pitchFamily="34" charset="0"/>
+                <a:ea typeface="Aptos" pitchFamily="34" charset="-122"/>
+                <a:cs typeface="Aptos" pitchFamily="34" charset="-120"/>
+              </a:rPr>
+              <a:t>6</a:t>
+            </a:r>
+            <a:endParaRPr lang="en-US" sz="1800" dirty="0"/>
+          </a:p>
+        </p:txBody>
+      </p:sp>
+      <p:sp>
+        <p:nvSpPr>
+          <p:cNvPr id="4" name="Shape 2"/>
+          <p:cNvSpPr/>
+          <p:nvPr/>
+        </p:nvSpPr>
+        <p:spPr>
+          <a:xfrm>
+            <a:off x="0" y="0"/>
+            <a:ext cx="12188952" cy="82296"/>
+          </a:xfrm>
+          <a:prstGeom prst="rect">
+            <a:avLst/>
+          </a:prstGeom>
+          <a:solidFill>
+            <a:srgbClr val="0F6CBD"/>
+          </a:solidFill>
+          <a:ln/>
+        </p:spPr>
+      </p:sp>
+      <p:sp>
+        <p:nvSpPr>
+          <p:cNvPr id="5" name="Text 3"/>
+          <p:cNvSpPr/>
+          <p:nvPr/>
+        </p:nvSpPr>
+        <p:spPr>
+          <a:xfrm>
+            <a:off x="502920" y="237744"/>
+            <a:ext cx="11183112" cy="347472"/>
+          </a:xfrm>
+          <a:prstGeom prst="rect">
+            <a:avLst/>
+          </a:prstGeom>
+          <a:noFill/>
+          <a:ln/>
+        </p:spPr>
+        <p:txBody>
+          <a:bodyPr wrap="square" rtlCol="0" anchor="ctr"/>
+          <a:lstStyle/>
+          <a:p>
+            <a:pPr indent="0" marL="0">
+              <a:buNone/>
+            </a:pPr>
+            <a:r>
+              <a:rPr lang="en-US" sz="1800" b="1" spc="200" kern="0" dirty="0">
+                <a:solidFill>
+                  <a:srgbClr val="0F6CBD"/>
+                </a:solidFill>
+                <a:latin typeface="Aptos" pitchFamily="34" charset="0"/>
+                <a:ea typeface="Aptos" pitchFamily="34" charset="-122"/>
+                <a:cs typeface="Aptos" pitchFamily="34" charset="-120"/>
+              </a:rPr>
+              <a:t>CHAIR THE MEETING</a:t>
+            </a:r>
+            <a:endParaRPr lang="en-US" sz="1800" dirty="0"/>
+          </a:p>
+        </p:txBody>
+      </p:sp>
+      <p:sp>
+        <p:nvSpPr>
+          <p:cNvPr id="6" name="Text 4"/>
+          <p:cNvSpPr/>
+          <p:nvPr/>
+        </p:nvSpPr>
+        <p:spPr>
+          <a:xfrm>
+            <a:off x="502920" y="585216"/>
+            <a:ext cx="11183112" cy="603504"/>
+          </a:xfrm>
+          <a:prstGeom prst="rect">
+            <a:avLst/>
+          </a:prstGeom>
+          <a:noFill/>
+          <a:ln/>
+        </p:spPr>
+        <p:txBody>
+          <a:bodyPr wrap="square" rtlCol="0" anchor="ctr"/>
+          <a:lstStyle/>
+          <a:p>
+            <a:pPr indent="0" marL="0">
+              <a:buNone/>
+            </a:pPr>
+            <a:r>
+              <a:rPr lang="en-US" sz="3000" b="1" dirty="0">
+                <a:solidFill>
+                  <a:srgbClr val="002050"/>
+                </a:solidFill>
+                <a:latin typeface="Aptos Display" pitchFamily="34" charset="0"/>
+                <a:ea typeface="Aptos Display" pitchFamily="34" charset="-122"/>
+                <a:cs typeface="Aptos Display" pitchFamily="34" charset="-120"/>
+              </a:rPr>
+              <a:t>Basic steps for chairing — decisions that stick</a:t>
+            </a:r>
+            <a:endParaRPr lang="en-US" sz="3000" dirty="0"/>
+          </a:p>
+        </p:txBody>
+      </p:sp>
+      <p:sp>
+        <p:nvSpPr>
+          <p:cNvPr id="7" name="Text 5"/>
+          <p:cNvSpPr/>
+          <p:nvPr/>
+        </p:nvSpPr>
+        <p:spPr>
+          <a:xfrm>
+            <a:off x="502920" y="1554480"/>
+            <a:ext cx="11183112" cy="4572000"/>
+          </a:xfrm>
+          <a:prstGeom prst="rect">
+            <a:avLst/>
+          </a:prstGeom>
+          <a:noFill/>
+          <a:ln/>
+        </p:spPr>
+        <p:txBody>
+          <a:bodyPr wrap="square" rtlCol="0" anchor="t"/>
+          <a:lstStyle/>
+          <a:p>
+            <a:pPr marL="203200" indent="-203200">
+              <a:lnSpc>
+                <a:spcPct val="120000"/>
+              </a:lnSpc>
+              <a:spcAft>
+                <a:spcPts val="1000"/>
+              </a:spcAft>
+              <a:buSzPct val="100000"/>
+              <a:buChar char="•"/>
+            </a:pPr>
+            <a:r>
+              <a:rPr lang="en-US" sz="1800" dirty="0">
+                <a:solidFill>
+                  <a:srgbClr val="002050"/>
+                </a:solidFill>
+                <a:latin typeface="Aptos" pitchFamily="34" charset="0"/>
+                <a:ea typeface="Aptos" pitchFamily="34" charset="-122"/>
+                <a:cs typeface="Aptos" pitchFamily="34" charset="-120"/>
+              </a:rPr>
+              <a:t>Call on individuals to introduce or lead each agenda point, give everyone a chance to speak — and ensure no one dominates the discussion.</a:t>
+            </a:r>
+            <a:endParaRPr lang="en-US" sz="1800" dirty="0"/>
+          </a:p>
+          <a:p>
+            <a:pPr marL="203200" indent="-203200">
+              <a:lnSpc>
+                <a:spcPct val="120000"/>
+              </a:lnSpc>
+              <a:spcAft>
+                <a:spcPts val="1000"/>
+              </a:spcAft>
+              <a:buSzPct val="100000"/>
+              <a:buChar char="•"/>
+            </a:pPr>
+            <a:r>
+              <a:rPr lang="en-US" sz="1800" dirty="0">
+                <a:solidFill>
+                  <a:srgbClr val="002050"/>
+                </a:solidFill>
+                <a:latin typeface="Aptos" pitchFamily="34" charset="0"/>
+                <a:ea typeface="Aptos" pitchFamily="34" charset="-122"/>
+                <a:cs typeface="Aptos" pitchFamily="34" charset="-120"/>
+              </a:rPr>
+              <a:t>Summarise the discussion clearly, restating the ideas and proposals put forward — without repeating everything that was said.</a:t>
+            </a:r>
+            <a:endParaRPr lang="en-US" sz="1800" dirty="0"/>
+          </a:p>
+          <a:p>
+            <a:pPr marL="203200" indent="-203200">
+              <a:lnSpc>
+                <a:spcPct val="120000"/>
+              </a:lnSpc>
+              <a:spcAft>
+                <a:spcPts val="1000"/>
+              </a:spcAft>
+              <a:buSzPct val="100000"/>
+              <a:buChar char="•"/>
+            </a:pPr>
+            <a:r>
+              <a:rPr lang="en-US" sz="1800" dirty="0">
+                <a:solidFill>
+                  <a:srgbClr val="002050"/>
+                </a:solidFill>
+                <a:latin typeface="Aptos" pitchFamily="34" charset="0"/>
+                <a:ea typeface="Aptos" pitchFamily="34" charset="-122"/>
+                <a:cs typeface="Aptos" pitchFamily="34" charset="-120"/>
+              </a:rPr>
+              <a:t>Get agreement on what the decision is, and make sure everyone understands it.</a:t>
+            </a:r>
+            <a:endParaRPr lang="en-US" sz="1800" dirty="0"/>
+          </a:p>
+          <a:p>
+            <a:pPr marL="203200" indent="-203200">
+              <a:lnSpc>
+                <a:spcPct val="120000"/>
+              </a:lnSpc>
+              <a:spcAft>
+                <a:spcPts val="1000"/>
+              </a:spcAft>
+              <a:buSzPct val="100000"/>
+              <a:buChar char="•"/>
+            </a:pPr>
+            <a:r>
+              <a:rPr lang="en-US" sz="1800" dirty="0">
+                <a:solidFill>
+                  <a:srgbClr val="002050"/>
+                </a:solidFill>
+                <a:latin typeface="Aptos" pitchFamily="34" charset="0"/>
+                <a:ea typeface="Aptos" pitchFamily="34" charset="-122"/>
+                <a:cs typeface="Aptos" pitchFamily="34" charset="-120"/>
+              </a:rPr>
+              <a:t>Delegate the duty of carrying out each decision — the responsible person must know exactly what to do, by when, and when to report back.</a:t>
+            </a:r>
+            <a:endParaRPr lang="en-US" sz="1800" dirty="0"/>
+          </a:p>
+          <a:p>
+            <a:pPr marL="203200" indent="-203200">
+              <a:lnSpc>
+                <a:spcPct val="120000"/>
+              </a:lnSpc>
+              <a:spcAft>
+                <a:spcPts val="1000"/>
+              </a:spcAft>
+              <a:buSzPct val="100000"/>
+              <a:buChar char="•"/>
+            </a:pPr>
+            <a:r>
+              <a:rPr lang="en-US" sz="1800" dirty="0">
+                <a:solidFill>
+                  <a:srgbClr val="002050"/>
+                </a:solidFill>
+                <a:latin typeface="Aptos" pitchFamily="34" charset="0"/>
+                <a:ea typeface="Aptos" pitchFamily="34" charset="-122"/>
+                <a:cs typeface="Aptos" pitchFamily="34" charset="-120"/>
+              </a:rPr>
+              <a:t>Ensure everyone takes part in the discussions and the decision-making.</a:t>
+            </a:r>
+            <a:endParaRPr lang="en-US" sz="1800" dirty="0"/>
+          </a:p>
+          <a:p>
+            <a:pPr marL="203200" indent="-203200">
+              <a:lnSpc>
+                <a:spcPct val="120000"/>
+              </a:lnSpc>
+              <a:spcAft>
+                <a:spcPts val="1000"/>
+              </a:spcAft>
+              <a:buSzPct val="100000"/>
+              <a:buChar char="•"/>
+            </a:pPr>
+            <a:r>
+              <a:rPr lang="en-US" sz="1800" dirty="0">
+                <a:solidFill>
+                  <a:srgbClr val="002050"/>
+                </a:solidFill>
+                <a:latin typeface="Aptos" pitchFamily="34" charset="0"/>
+                <a:ea typeface="Aptos" pitchFamily="34" charset="-122"/>
+                <a:cs typeface="Aptos" pitchFamily="34" charset="-120"/>
+              </a:rPr>
+              <a:t>Always set the date for the next meeting before this one ends.</a:t>
+            </a:r>
+            <a:endParaRPr lang="en-US" sz="1800" dirty="0"/>
+          </a:p>
+        </p:txBody>
+      </p:sp>
+    </p:spTree>
+  </p:cSld>
+  <p:clrMapOvr>
+    <a:masterClrMapping/>
+  </p:clrMapOvr>
+</p:sld>
+</file>
+
+<file path=ppt/slides/slide7.xml><?xml version="1.0" encoding="utf-8"?>
+<p:sld xmlns:a="http://schemas.openxmlformats.org/drawingml/2006/main" xmlns:r="http://schemas.openxmlformats.org/officeDocument/2006/relationships" xmlns:p="http://schemas.openxmlformats.org/presentationml/2006/main">
+  <p:cSld name="Slide 7">
+    <p:bg>
+      <p:bgPr>
+        <a:solidFill>
+          <a:srgbClr val="FFFFFF"/>
+        </a:solidFill>
+      </p:bgPr>
+    </p:bg>
+    <p:spTree>
+      <p:nvGrpSpPr>
+        <p:cNvPr id="1" name=""/>
+        <p:cNvGrpSpPr/>
+        <p:nvPr/>
+      </p:nvGrpSpPr>
+      <p:grpSpPr>
+        <a:xfrm>
+          <a:off x="0" y="0"/>
+          <a:ext cx="0" cy="0"/>
+          <a:chOff x="0" y="0"/>
+          <a:chExt cx="0" cy="0"/>
+        </a:xfrm>
+      </p:grpSpPr>
+      <p:sp>
+        <p:nvSpPr>
+          <p:cNvPr id="2" name="Text 0"/>
+          <p:cNvSpPr/>
+          <p:nvPr/>
+        </p:nvSpPr>
+        <p:spPr>
+          <a:xfrm>
+            <a:off x="502920" y="6400800"/>
+            <a:ext cx="10268712" cy="347472"/>
+          </a:xfrm>
+          <a:prstGeom prst="rect">
+            <a:avLst/>
+          </a:prstGeom>
+          <a:noFill/>
+          <a:ln/>
+        </p:spPr>
+        <p:txBody>
+          <a:bodyPr wrap="square" rtlCol="0" anchor="ctr"/>
+          <a:lstStyle/>
+          <a:p>
+            <a:pPr indent="0" marL="0">
+              <a:buNone/>
+            </a:pPr>
+            <a:r>
+              <a:rPr lang="en-US" sz="1800" dirty="0">
+                <a:solidFill>
+                  <a:srgbClr val="6B7280"/>
+                </a:solidFill>
+                <a:latin typeface="Aptos" pitchFamily="34" charset="0"/>
+                <a:ea typeface="Aptos" pitchFamily="34" charset="-122"/>
+                <a:cs typeface="Aptos" pitchFamily="34" charset="-120"/>
+              </a:rPr>
+              <a:t>US 114051 · Conduct a technical practitioners meeting · NQF 5 · 4 credits</a:t>
+            </a:r>
+            <a:endParaRPr lang="en-US" sz="1800" dirty="0"/>
+          </a:p>
+        </p:txBody>
+      </p:sp>
+      <p:sp>
+        <p:nvSpPr>
+          <p:cNvPr id="3" name="Text 1"/>
+          <p:cNvSpPr/>
+          <p:nvPr/>
+        </p:nvSpPr>
+        <p:spPr>
+          <a:xfrm>
+            <a:off x="11045952" y="6400800"/>
+            <a:ext cx="640080" cy="347472"/>
+          </a:xfrm>
+          <a:prstGeom prst="rect">
+            <a:avLst/>
+          </a:prstGeom>
+          <a:noFill/>
+          <a:ln/>
+        </p:spPr>
+        <p:txBody>
+          <a:bodyPr wrap="square" rtlCol="0" anchor="ctr"/>
+          <a:lstStyle/>
+          <a:p>
+            <a:pPr algn="r" indent="0" marL="0">
+              <a:buNone/>
+            </a:pPr>
+            <a:r>
+              <a:rPr lang="en-US" sz="1800" dirty="0">
+                <a:solidFill>
+                  <a:srgbClr val="6B7280"/>
+                </a:solidFill>
+                <a:latin typeface="Aptos" pitchFamily="34" charset="0"/>
+                <a:ea typeface="Aptos" pitchFamily="34" charset="-122"/>
+                <a:cs typeface="Aptos" pitchFamily="34" charset="-120"/>
+              </a:rPr>
+              <a:t>7</a:t>
+            </a:r>
+            <a:endParaRPr lang="en-US" sz="1800" dirty="0"/>
+          </a:p>
+        </p:txBody>
+      </p:sp>
+      <p:sp>
+        <p:nvSpPr>
+          <p:cNvPr id="4" name="Shape 2"/>
+          <p:cNvSpPr/>
+          <p:nvPr/>
+        </p:nvSpPr>
+        <p:spPr>
+          <a:xfrm>
+            <a:off x="0" y="0"/>
+            <a:ext cx="12188952" cy="82296"/>
+          </a:xfrm>
+          <a:prstGeom prst="rect">
+            <a:avLst/>
+          </a:prstGeom>
+          <a:solidFill>
+            <a:srgbClr val="0F6CBD"/>
+          </a:solidFill>
+          <a:ln/>
+        </p:spPr>
+      </p:sp>
+      <p:sp>
+        <p:nvSpPr>
+          <p:cNvPr id="5" name="Text 3"/>
+          <p:cNvSpPr/>
+          <p:nvPr/>
+        </p:nvSpPr>
+        <p:spPr>
+          <a:xfrm>
+            <a:off x="502920" y="237744"/>
+            <a:ext cx="11183112" cy="347472"/>
+          </a:xfrm>
+          <a:prstGeom prst="rect">
+            <a:avLst/>
+          </a:prstGeom>
+          <a:noFill/>
+          <a:ln/>
+        </p:spPr>
+        <p:txBody>
+          <a:bodyPr wrap="square" rtlCol="0" anchor="ctr"/>
+          <a:lstStyle/>
+          <a:p>
+            <a:pPr indent="0" marL="0">
+              <a:buNone/>
+            </a:pPr>
+            <a:r>
+              <a:rPr lang="en-US" sz="1800" b="1" spc="200" kern="0" dirty="0">
+                <a:solidFill>
+                  <a:srgbClr val="0F6CBD"/>
+                </a:solidFill>
+                <a:latin typeface="Aptos" pitchFamily="34" charset="0"/>
+                <a:ea typeface="Aptos" pitchFamily="34" charset="-122"/>
+                <a:cs typeface="Aptos" pitchFamily="34" charset="-120"/>
+              </a:rPr>
+              <a:t>CHAIR THE MEETING</a:t>
+            </a:r>
+            <a:endParaRPr lang="en-US" sz="1800" dirty="0"/>
+          </a:p>
+        </p:txBody>
+      </p:sp>
+      <p:sp>
+        <p:nvSpPr>
+          <p:cNvPr id="6" name="Text 4"/>
+          <p:cNvSpPr/>
+          <p:nvPr/>
+        </p:nvSpPr>
+        <p:spPr>
+          <a:xfrm>
+            <a:off x="502920" y="585216"/>
+            <a:ext cx="11183112" cy="603504"/>
+          </a:xfrm>
+          <a:prstGeom prst="rect">
+            <a:avLst/>
+          </a:prstGeom>
+          <a:noFill/>
+          <a:ln/>
+        </p:spPr>
+        <p:txBody>
+          <a:bodyPr wrap="square" rtlCol="0" anchor="ctr"/>
+          <a:lstStyle/>
+          <a:p>
+            <a:pPr indent="0" marL="0">
+              <a:buNone/>
+            </a:pPr>
+            <a:r>
+              <a:rPr lang="en-US" sz="3000" b="1" dirty="0">
+                <a:solidFill>
+                  <a:srgbClr val="002050"/>
+                </a:solidFill>
+                <a:latin typeface="Aptos Display" pitchFamily="34" charset="0"/>
+                <a:ea typeface="Aptos Display" pitchFamily="34" charset="-122"/>
+                <a:cs typeface="Aptos Display" pitchFamily="34" charset="-120"/>
+              </a:rPr>
+              <a:t>Facilitation skills that make it work</a:t>
+            </a:r>
+            <a:endParaRPr lang="en-US" sz="3000" dirty="0"/>
+          </a:p>
+        </p:txBody>
+      </p:sp>
+      <p:sp>
+        <p:nvSpPr>
+          <p:cNvPr id="7" name="Shape 5"/>
+          <p:cNvSpPr/>
+          <p:nvPr/>
+        </p:nvSpPr>
+        <p:spPr>
+          <a:xfrm>
+            <a:off x="502920" y="1600200"/>
+            <a:ext cx="3605784" cy="2103120"/>
+          </a:xfrm>
+          <a:prstGeom prst="roundRect">
+            <a:avLst>
+              <a:gd name="adj" fmla="val 3913"/>
+            </a:avLst>
+          </a:prstGeom>
+          <a:solidFill>
+            <a:srgbClr val="FFFFFF"/>
+          </a:solidFill>
+          <a:ln w="12700">
+            <a:solidFill>
+              <a:srgbClr val="D5E3F2"/>
+            </a:solidFill>
+            <a:prstDash val="solid"/>
+          </a:ln>
+          <a:effectLst>
+            <a:outerShdw sx="100000" sy="100000" kx="0" ky="0" algn="bl" rotWithShape="0" blurRad="88900" dist="25400" dir="5400000">
+              <a:srgbClr val="9AB4CC">
+                <a:alpha val="30000"/>
+              </a:srgbClr>
+            </a:outerShdw>
+          </a:effectLst>
+        </p:spPr>
+      </p:sp>
+      <p:pic>
+        <p:nvPicPr>
+          <p:cNvPr id="8" name="Image 0" descr="preencoded.png">    </p:cNvPr>
+          <p:cNvPicPr>
+            <a:picLocks noChangeAspect="1"/>
+          </p:cNvPicPr>
+          <p:nvPr/>
+        </p:nvPicPr>
+        <p:blipFill>
+          <a:blip r:embed="rId1">
+            <a:extLst>
+              <a:ext uri="{96DAC541-7B7A-43D3-8B79-37D633B846F1}">
+                <asvg:svgBlip xmlns:asvg="http://schemas.microsoft.com/office/drawing/2016/SVG/main" r:embed="rId2"/>
+              </a:ext>
+            </a:extLst>
+          </a:blip>
+          <a:stretch>
+            <a:fillRect/>
+          </a:stretch>
+        </p:blipFill>
+        <p:spPr>
+          <a:xfrm>
+            <a:off x="667512" y="1783080"/>
+            <a:ext cx="347472" cy="347472"/>
+          </a:xfrm>
+          <a:prstGeom prst="rect">
+            <a:avLst/>
+          </a:prstGeom>
+        </p:spPr>
+      </p:pic>
+      <p:sp>
+        <p:nvSpPr>
+          <p:cNvPr id="9" name="Text 6"/>
+          <p:cNvSpPr/>
+          <p:nvPr/>
+        </p:nvSpPr>
+        <p:spPr>
+          <a:xfrm>
+            <a:off x="1106424" y="1709928"/>
+            <a:ext cx="2837688" cy="777240"/>
+          </a:xfrm>
+          <a:prstGeom prst="rect">
+            <a:avLst/>
+          </a:prstGeom>
+          <a:noFill/>
+          <a:ln/>
+        </p:spPr>
+        <p:txBody>
+          <a:bodyPr wrap="square" rtlCol="0" anchor="ctr"/>
+          <a:lstStyle/>
+          <a:p>
+            <a:pPr indent="0" marL="0">
+              <a:lnSpc>
+                <a:spcPct val="100000"/>
+              </a:lnSpc>
+              <a:buNone/>
+            </a:pPr>
+            <a:r>
+              <a:rPr lang="en-US" sz="2000" b="1" dirty="0">
+                <a:solidFill>
+                  <a:srgbClr val="002050"/>
+                </a:solidFill>
+                <a:latin typeface="Aptos Display" pitchFamily="34" charset="0"/>
+                <a:ea typeface="Aptos Display" pitchFamily="34" charset="-122"/>
+                <a:cs typeface="Aptos Display" pitchFamily="34" charset="-120"/>
+              </a:rPr>
+              <a:t>Encourage discussion</a:t>
+            </a:r>
+            <a:endParaRPr lang="en-US" sz="2000" dirty="0"/>
+          </a:p>
+        </p:txBody>
+      </p:sp>
+      <p:sp>
+        <p:nvSpPr>
+          <p:cNvPr id="10" name="Text 7"/>
+          <p:cNvSpPr/>
+          <p:nvPr/>
+        </p:nvSpPr>
+        <p:spPr>
+          <a:xfrm>
+            <a:off x="667512" y="2532888"/>
+            <a:ext cx="3276600" cy="1042416"/>
+          </a:xfrm>
+          <a:prstGeom prst="rect">
+            <a:avLst/>
+          </a:prstGeom>
+          <a:noFill/>
+          <a:ln/>
+        </p:spPr>
+        <p:txBody>
+          <a:bodyPr wrap="square" rtlCol="0" anchor="t"/>
+          <a:lstStyle/>
+          <a:p>
+            <a:pPr indent="0" marL="0">
+              <a:lnSpc>
+                <a:spcPct val="110000"/>
+              </a:lnSpc>
+              <a:buNone/>
+            </a:pPr>
+            <a:r>
+              <a:rPr lang="en-US" sz="1800" dirty="0">
+                <a:solidFill>
+                  <a:srgbClr val="6B7280"/>
+                </a:solidFill>
+                <a:latin typeface="Aptos" pitchFamily="34" charset="0"/>
+                <a:ea typeface="Aptos" pitchFamily="34" charset="-122"/>
+                <a:cs typeface="Aptos" pitchFamily="34" charset="-120"/>
+              </a:rPr>
+              <a:t>Turn questions back to the group, ask open-ended questions, compliment ideas — let people say “ditto” instead of repeating.</a:t>
+            </a:r>
+            <a:endParaRPr lang="en-US" sz="1800" dirty="0"/>
+          </a:p>
+        </p:txBody>
+      </p:sp>
+      <p:sp>
+        <p:nvSpPr>
+          <p:cNvPr id="11" name="Shape 8"/>
+          <p:cNvSpPr/>
+          <p:nvPr/>
+        </p:nvSpPr>
+        <p:spPr>
+          <a:xfrm>
+            <a:off x="4291584" y="1600200"/>
+            <a:ext cx="3605784" cy="2103120"/>
+          </a:xfrm>
+          <a:prstGeom prst="roundRect">
+            <a:avLst>
+              <a:gd name="adj" fmla="val 3913"/>
+            </a:avLst>
+          </a:prstGeom>
+          <a:solidFill>
+            <a:srgbClr val="FFFFFF"/>
+          </a:solidFill>
+          <a:ln w="12700">
+            <a:solidFill>
+              <a:srgbClr val="D5E3F2"/>
+            </a:solidFill>
+            <a:prstDash val="solid"/>
+          </a:ln>
+          <a:effectLst>
+            <a:outerShdw sx="100000" sy="100000" kx="0" ky="0" algn="bl" rotWithShape="0" blurRad="88900" dist="25400" dir="5400000">
+              <a:srgbClr val="9AB4CC">
+                <a:alpha val="30000"/>
+              </a:srgbClr>
+            </a:outerShdw>
+          </a:effectLst>
+        </p:spPr>
+      </p:sp>
+      <p:pic>
+        <p:nvPicPr>
+          <p:cNvPr id="12" name="Image 1" descr="preencoded.png">    </p:cNvPr>
+          <p:cNvPicPr>
+            <a:picLocks noChangeAspect="1"/>
+          </p:cNvPicPr>
+          <p:nvPr/>
+        </p:nvPicPr>
+        <p:blipFill>
+          <a:blip r:embed="rId3">
+            <a:extLst>
+              <a:ext uri="{96DAC541-7B7A-43D3-8B79-37D633B846F1}">
+                <asvg:svgBlip xmlns:asvg="http://schemas.microsoft.com/office/drawing/2016/SVG/main" r:embed="rId4"/>
+              </a:ext>
+            </a:extLst>
+          </a:blip>
+          <a:stretch>
+            <a:fillRect/>
+          </a:stretch>
+        </p:blipFill>
+        <p:spPr>
+          <a:xfrm>
+            <a:off x="4456176" y="1783080"/>
+            <a:ext cx="347472" cy="347472"/>
+          </a:xfrm>
+          <a:prstGeom prst="rect">
+            <a:avLst/>
+          </a:prstGeom>
+        </p:spPr>
+      </p:pic>
+      <p:sp>
+        <p:nvSpPr>
+          <p:cNvPr id="13" name="Text 9"/>
+          <p:cNvSpPr/>
+          <p:nvPr/>
+        </p:nvSpPr>
+        <p:spPr>
+          <a:xfrm>
+            <a:off x="4895088" y="1709928"/>
+            <a:ext cx="2837688" cy="777240"/>
+          </a:xfrm>
+          <a:prstGeom prst="rect">
+            <a:avLst/>
+          </a:prstGeom>
+          <a:noFill/>
+          <a:ln/>
+        </p:spPr>
+        <p:txBody>
+          <a:bodyPr wrap="square" rtlCol="0" anchor="ctr"/>
+          <a:lstStyle/>
+          <a:p>
+            <a:pPr indent="0" marL="0">
+              <a:lnSpc>
+                <a:spcPct val="100000"/>
+              </a:lnSpc>
+              <a:buNone/>
+            </a:pPr>
+            <a:r>
+              <a:rPr lang="en-US" sz="2000" b="1" dirty="0">
+                <a:solidFill>
+                  <a:srgbClr val="002050"/>
+                </a:solidFill>
+                <a:latin typeface="Aptos Display" pitchFamily="34" charset="0"/>
+                <a:ea typeface="Aptos Display" pitchFamily="34" charset="-122"/>
+                <a:cs typeface="Aptos Display" pitchFamily="34" charset="-120"/>
+              </a:rPr>
+              <a:t>Manage the traffic</a:t>
+            </a:r>
+            <a:endParaRPr lang="en-US" sz="2000" dirty="0"/>
+          </a:p>
+        </p:txBody>
+      </p:sp>
+      <p:sp>
+        <p:nvSpPr>
+          <p:cNvPr id="14" name="Text 10"/>
+          <p:cNvSpPr/>
+          <p:nvPr/>
+        </p:nvSpPr>
+        <p:spPr>
+          <a:xfrm>
+            <a:off x="4456176" y="2532888"/>
+            <a:ext cx="3276600" cy="1042416"/>
+          </a:xfrm>
+          <a:prstGeom prst="rect">
+            <a:avLst/>
+          </a:prstGeom>
+          <a:noFill/>
+          <a:ln/>
+        </p:spPr>
+        <p:txBody>
+          <a:bodyPr wrap="square" rtlCol="0" anchor="t"/>
+          <a:lstStyle/>
+          <a:p>
+            <a:pPr indent="0" marL="0">
+              <a:lnSpc>
+                <a:spcPct val="110000"/>
+              </a:lnSpc>
+              <a:buNone/>
+            </a:pPr>
+            <a:r>
+              <a:rPr lang="en-US" sz="1800" dirty="0">
+                <a:solidFill>
+                  <a:srgbClr val="6B7280"/>
+                </a:solidFill>
+                <a:latin typeface="Aptos" pitchFamily="34" charset="0"/>
+                <a:ea typeface="Aptos" pitchFamily="34" charset="-122"/>
+                <a:cs typeface="Aptos" pitchFamily="34" charset="-120"/>
+              </a:rPr>
+              <a:t>Jot down speakers in order; let first-time speakers skip the queue; no second turn until everyone has spoken once.</a:t>
+            </a:r>
+            <a:endParaRPr lang="en-US" sz="1800" dirty="0"/>
+          </a:p>
+        </p:txBody>
+      </p:sp>
+      <p:sp>
+        <p:nvSpPr>
+          <p:cNvPr id="15" name="Shape 11"/>
+          <p:cNvSpPr/>
+          <p:nvPr/>
+        </p:nvSpPr>
+        <p:spPr>
+          <a:xfrm>
+            <a:off x="8080248" y="1600200"/>
+            <a:ext cx="3605784" cy="2103120"/>
+          </a:xfrm>
+          <a:prstGeom prst="roundRect">
+            <a:avLst>
+              <a:gd name="adj" fmla="val 3913"/>
+            </a:avLst>
+          </a:prstGeom>
+          <a:solidFill>
+            <a:srgbClr val="FFFFFF"/>
+          </a:solidFill>
+          <a:ln w="12700">
+            <a:solidFill>
+              <a:srgbClr val="D5E3F2"/>
+            </a:solidFill>
+            <a:prstDash val="solid"/>
+          </a:ln>
+          <a:effectLst>
+            <a:outerShdw sx="100000" sy="100000" kx="0" ky="0" algn="bl" rotWithShape="0" blurRad="88900" dist="25400" dir="5400000">
+              <a:srgbClr val="9AB4CC">
+                <a:alpha val="30000"/>
+              </a:srgbClr>
+            </a:outerShdw>
+          </a:effectLst>
+        </p:spPr>
+      </p:sp>
+      <p:pic>
+        <p:nvPicPr>
+          <p:cNvPr id="16" name="Image 2" descr="preencoded.png">    </p:cNvPr>
+          <p:cNvPicPr>
+            <a:picLocks noChangeAspect="1"/>
+          </p:cNvPicPr>
+          <p:nvPr/>
+        </p:nvPicPr>
+        <p:blipFill>
+          <a:blip r:embed="rId5">
+            <a:extLst>
+              <a:ext uri="{96DAC541-7B7A-43D3-8B79-37D633B846F1}">
+                <asvg:svgBlip xmlns:asvg="http://schemas.microsoft.com/office/drawing/2016/SVG/main" r:embed="rId6"/>
+              </a:ext>
+            </a:extLst>
+          </a:blip>
+          <a:stretch>
+            <a:fillRect/>
+          </a:stretch>
+        </p:blipFill>
+        <p:spPr>
+          <a:xfrm>
+            <a:off x="8244840" y="1783080"/>
+            <a:ext cx="347472" cy="347472"/>
+          </a:xfrm>
+          <a:prstGeom prst="rect">
+            <a:avLst/>
+          </a:prstGeom>
+        </p:spPr>
+      </p:pic>
+      <p:sp>
+        <p:nvSpPr>
+          <p:cNvPr id="17" name="Text 12"/>
+          <p:cNvSpPr/>
+          <p:nvPr/>
+        </p:nvSpPr>
+        <p:spPr>
+          <a:xfrm>
+            <a:off x="8683752" y="1709928"/>
+            <a:ext cx="2837688" cy="777240"/>
+          </a:xfrm>
+          <a:prstGeom prst="rect">
+            <a:avLst/>
+          </a:prstGeom>
+          <a:noFill/>
+          <a:ln/>
+        </p:spPr>
+        <p:txBody>
+          <a:bodyPr wrap="square" rtlCol="0" anchor="ctr"/>
+          <a:lstStyle/>
+          <a:p>
+            <a:pPr indent="0" marL="0">
+              <a:lnSpc>
+                <a:spcPct val="100000"/>
+              </a:lnSpc>
+              <a:buNone/>
+            </a:pPr>
+            <a:r>
+              <a:rPr lang="en-US" sz="2000" b="1" dirty="0">
+                <a:solidFill>
+                  <a:srgbClr val="002050"/>
+                </a:solidFill>
+                <a:latin typeface="Aptos Display" pitchFamily="34" charset="0"/>
+                <a:ea typeface="Aptos Display" pitchFamily="34" charset="-122"/>
+                <a:cs typeface="Aptos Display" pitchFamily="34" charset="-120"/>
+              </a:rPr>
+              <a:t>Stay neutral</a:t>
+            </a:r>
+            <a:endParaRPr lang="en-US" sz="2000" dirty="0"/>
+          </a:p>
+        </p:txBody>
+      </p:sp>
+      <p:sp>
+        <p:nvSpPr>
+          <p:cNvPr id="18" name="Text 13"/>
+          <p:cNvSpPr/>
+          <p:nvPr/>
+        </p:nvSpPr>
+        <p:spPr>
+          <a:xfrm>
+            <a:off x="8244840" y="2532888"/>
+            <a:ext cx="3276600" cy="1042416"/>
+          </a:xfrm>
+          <a:prstGeom prst="rect">
+            <a:avLst/>
+          </a:prstGeom>
+          <a:noFill/>
+          <a:ln/>
+        </p:spPr>
+        <p:txBody>
+          <a:bodyPr wrap="square" rtlCol="0" anchor="t"/>
+          <a:lstStyle/>
+          <a:p>
+            <a:pPr indent="0" marL="0">
+              <a:lnSpc>
+                <a:spcPct val="110000"/>
+              </a:lnSpc>
+              <a:buNone/>
+            </a:pPr>
+            <a:r>
+              <a:rPr lang="en-US" sz="1800" dirty="0">
+                <a:solidFill>
+                  <a:srgbClr val="6B7280"/>
+                </a:solidFill>
+                <a:latin typeface="Aptos" pitchFamily="34" charset="0"/>
+                <a:ea typeface="Aptos" pitchFamily="34" charset="-122"/>
+                <a:cs typeface="Aptos" pitchFamily="34" charset="-120"/>
+              </a:rPr>
+              <a:t>Don't use the chair to impose your own opinions — step aside if you feel strongly, speak last, and mark personal views as personal.</a:t>
+            </a:r>
+            <a:endParaRPr lang="en-US" sz="1800" dirty="0"/>
+          </a:p>
+        </p:txBody>
+      </p:sp>
+      <p:sp>
+        <p:nvSpPr>
+          <p:cNvPr id="19" name="Shape 14"/>
+          <p:cNvSpPr/>
+          <p:nvPr/>
+        </p:nvSpPr>
+        <p:spPr>
+          <a:xfrm>
+            <a:off x="502920" y="3886200"/>
+            <a:ext cx="3605784" cy="2103120"/>
+          </a:xfrm>
+          <a:prstGeom prst="roundRect">
+            <a:avLst>
+              <a:gd name="adj" fmla="val 3913"/>
+            </a:avLst>
+          </a:prstGeom>
+          <a:solidFill>
+            <a:srgbClr val="FFFFFF"/>
+          </a:solidFill>
+          <a:ln w="12700">
+            <a:solidFill>
+              <a:srgbClr val="D5E3F2"/>
+            </a:solidFill>
+            <a:prstDash val="solid"/>
+          </a:ln>
+          <a:effectLst>
+            <a:outerShdw sx="100000" sy="100000" kx="0" ky="0" algn="bl" rotWithShape="0" blurRad="88900" dist="25400" dir="5400000">
+              <a:srgbClr val="9AB4CC">
+                <a:alpha val="30000"/>
+              </a:srgbClr>
+            </a:outerShdw>
+          </a:effectLst>
+        </p:spPr>
+      </p:sp>
+      <p:pic>
+        <p:nvPicPr>
+          <p:cNvPr id="20" name="Image 3" descr="preencoded.png">    </p:cNvPr>
+          <p:cNvPicPr>
+            <a:picLocks noChangeAspect="1"/>
+          </p:cNvPicPr>
+          <p:nvPr/>
+        </p:nvPicPr>
+        <p:blipFill>
+          <a:blip r:embed="rId7">
+            <a:extLst>
+              <a:ext uri="{96DAC541-7B7A-43D3-8B79-37D633B846F1}">
+                <asvg:svgBlip xmlns:asvg="http://schemas.microsoft.com/office/drawing/2016/SVG/main" r:embed="rId8"/>
+              </a:ext>
+            </a:extLst>
+          </a:blip>
+          <a:stretch>
+            <a:fillRect/>
+          </a:stretch>
+        </p:blipFill>
+        <p:spPr>
+          <a:xfrm>
+            <a:off x="667512" y="4069080"/>
+            <a:ext cx="347472" cy="347472"/>
+          </a:xfrm>
+          <a:prstGeom prst="rect">
+            <a:avLst/>
+          </a:prstGeom>
+        </p:spPr>
+      </p:pic>
+      <p:sp>
+        <p:nvSpPr>
+          <p:cNvPr id="21" name="Text 15"/>
+          <p:cNvSpPr/>
+          <p:nvPr/>
+        </p:nvSpPr>
+        <p:spPr>
+          <a:xfrm>
+            <a:off x="1106424" y="3995928"/>
+            <a:ext cx="2837688" cy="777240"/>
+          </a:xfrm>
+          <a:prstGeom prst="rect">
+            <a:avLst/>
+          </a:prstGeom>
+          <a:noFill/>
+          <a:ln/>
+        </p:spPr>
+        <p:txBody>
+          <a:bodyPr wrap="square" rtlCol="0" anchor="ctr"/>
+          <a:lstStyle/>
+          <a:p>
+            <a:pPr indent="0" marL="0">
+              <a:lnSpc>
+                <a:spcPct val="100000"/>
+              </a:lnSpc>
+              <a:buNone/>
+            </a:pPr>
+            <a:r>
+              <a:rPr lang="en-US" sz="2000" b="1" dirty="0">
+                <a:solidFill>
+                  <a:srgbClr val="002050"/>
+                </a:solidFill>
+                <a:latin typeface="Aptos Display" pitchFamily="34" charset="0"/>
+                <a:ea typeface="Aptos Display" pitchFamily="34" charset="-122"/>
+                <a:cs typeface="Aptos Display" pitchFamily="34" charset="-120"/>
+              </a:rPr>
+              <a:t>Watch the non-verbals</a:t>
+            </a:r>
+            <a:endParaRPr lang="en-US" sz="2000" dirty="0"/>
+          </a:p>
+        </p:txBody>
+      </p:sp>
+      <p:sp>
+        <p:nvSpPr>
+          <p:cNvPr id="22" name="Text 16"/>
+          <p:cNvSpPr/>
+          <p:nvPr/>
+        </p:nvSpPr>
+        <p:spPr>
+          <a:xfrm>
+            <a:off x="667512" y="4818888"/>
+            <a:ext cx="3276600" cy="1042416"/>
+          </a:xfrm>
+          <a:prstGeom prst="rect">
+            <a:avLst/>
+          </a:prstGeom>
+          <a:noFill/>
+          <a:ln/>
+        </p:spPr>
+        <p:txBody>
+          <a:bodyPr wrap="square" rtlCol="0" anchor="t"/>
+          <a:lstStyle/>
+          <a:p>
+            <a:pPr indent="0" marL="0">
+              <a:lnSpc>
+                <a:spcPct val="110000"/>
+              </a:lnSpc>
+              <a:buNone/>
+            </a:pPr>
+            <a:r>
+              <a:rPr lang="en-US" sz="1800" dirty="0">
+                <a:solidFill>
+                  <a:srgbClr val="6B7280"/>
+                </a:solidFill>
+                <a:latin typeface="Aptos" pitchFamily="34" charset="0"/>
+                <a:ea typeface="Aptos" pitchFamily="34" charset="-122"/>
+                <a:cs typeface="Aptos" pitchFamily="34" charset="-120"/>
+              </a:rPr>
+              <a:t>Look at speakers, lean forward, nod; make eye contact with people who need encouragement — spot the half-raised hand.</a:t>
+            </a:r>
+            <a:endParaRPr lang="en-US" sz="1800" dirty="0"/>
+          </a:p>
+        </p:txBody>
+      </p:sp>
+      <p:sp>
+        <p:nvSpPr>
+          <p:cNvPr id="23" name="Shape 17"/>
+          <p:cNvSpPr/>
+          <p:nvPr/>
+        </p:nvSpPr>
+        <p:spPr>
+          <a:xfrm>
+            <a:off x="4291584" y="3886200"/>
+            <a:ext cx="3605784" cy="2103120"/>
+          </a:xfrm>
+          <a:prstGeom prst="roundRect">
+            <a:avLst>
+              <a:gd name="adj" fmla="val 3913"/>
+            </a:avLst>
+          </a:prstGeom>
+          <a:solidFill>
+            <a:srgbClr val="FFFFFF"/>
+          </a:solidFill>
+          <a:ln w="12700">
+            <a:solidFill>
+              <a:srgbClr val="D5E3F2"/>
+            </a:solidFill>
+            <a:prstDash val="solid"/>
+          </a:ln>
+          <a:effectLst>
+            <a:outerShdw sx="100000" sy="100000" kx="0" ky="0" algn="bl" rotWithShape="0" blurRad="88900" dist="25400" dir="5400000">
+              <a:srgbClr val="9AB4CC">
+                <a:alpha val="30000"/>
+              </a:srgbClr>
+            </a:outerShdw>
+          </a:effectLst>
+        </p:spPr>
+      </p:sp>
+      <p:pic>
+        <p:nvPicPr>
+          <p:cNvPr id="24" name="Image 4" descr="preencoded.png">    </p:cNvPr>
+          <p:cNvPicPr>
+            <a:picLocks noChangeAspect="1"/>
+          </p:cNvPicPr>
+          <p:nvPr/>
+        </p:nvPicPr>
+        <p:blipFill>
+          <a:blip r:embed="rId9">
+            <a:extLst>
+              <a:ext uri="{96DAC541-7B7A-43D3-8B79-37D633B846F1}">
+                <asvg:svgBlip xmlns:asvg="http://schemas.microsoft.com/office/drawing/2016/SVG/main" r:embed="rId10"/>
+              </a:ext>
+            </a:extLst>
+          </a:blip>
+          <a:stretch>
+            <a:fillRect/>
+          </a:stretch>
+        </p:blipFill>
+        <p:spPr>
+          <a:xfrm>
+            <a:off x="4456176" y="4069080"/>
+            <a:ext cx="347472" cy="347472"/>
+          </a:xfrm>
+          <a:prstGeom prst="rect">
+            <a:avLst/>
+          </a:prstGeom>
+        </p:spPr>
+      </p:pic>
+      <p:sp>
+        <p:nvSpPr>
+          <p:cNvPr id="25" name="Text 18"/>
+          <p:cNvSpPr/>
+          <p:nvPr/>
+        </p:nvSpPr>
+        <p:spPr>
+          <a:xfrm>
+            <a:off x="4895088" y="3995928"/>
+            <a:ext cx="2837688" cy="777240"/>
+          </a:xfrm>
+          <a:prstGeom prst="rect">
+            <a:avLst/>
+          </a:prstGeom>
+          <a:noFill/>
+          <a:ln/>
+        </p:spPr>
+        <p:txBody>
+          <a:bodyPr wrap="square" rtlCol="0" anchor="ctr"/>
+          <a:lstStyle/>
+          <a:p>
+            <a:pPr indent="0" marL="0">
+              <a:lnSpc>
+                <a:spcPct val="100000"/>
+              </a:lnSpc>
+              <a:buNone/>
+            </a:pPr>
+            <a:r>
+              <a:rPr lang="en-US" sz="2000" b="1" dirty="0">
+                <a:solidFill>
+                  <a:srgbClr val="002050"/>
+                </a:solidFill>
+                <a:latin typeface="Aptos Display" pitchFamily="34" charset="0"/>
+                <a:ea typeface="Aptos Display" pitchFamily="34" charset="-122"/>
+                <a:cs typeface="Aptos Display" pitchFamily="34" charset="-120"/>
+              </a:rPr>
+              <a:t>Use silence</a:t>
+            </a:r>
+            <a:endParaRPr lang="en-US" sz="2000" dirty="0"/>
+          </a:p>
+        </p:txBody>
+      </p:sp>
+      <p:sp>
+        <p:nvSpPr>
+          <p:cNvPr id="26" name="Text 19"/>
+          <p:cNvSpPr/>
+          <p:nvPr/>
+        </p:nvSpPr>
+        <p:spPr>
+          <a:xfrm>
+            <a:off x="4456176" y="4818888"/>
+            <a:ext cx="3276600" cy="1042416"/>
+          </a:xfrm>
+          <a:prstGeom prst="rect">
+            <a:avLst/>
+          </a:prstGeom>
+          <a:noFill/>
+          <a:ln/>
+        </p:spPr>
+        <p:txBody>
+          <a:bodyPr wrap="square" rtlCol="0" anchor="t"/>
+          <a:lstStyle/>
+          <a:p>
+            <a:pPr indent="0" marL="0">
+              <a:lnSpc>
+                <a:spcPct val="110000"/>
+              </a:lnSpc>
+              <a:buNone/>
+            </a:pPr>
+            <a:r>
+              <a:rPr lang="en-US" sz="1800" dirty="0">
+                <a:solidFill>
+                  <a:srgbClr val="6B7280"/>
+                </a:solidFill>
+                <a:latin typeface="Aptos" pitchFamily="34" charset="0"/>
+                <a:ea typeface="Aptos" pitchFamily="34" charset="-122"/>
+                <a:cs typeface="Aptos" pitchFamily="34" charset="-120"/>
+              </a:rPr>
+              <a:t>Don't fear silence — it gives people a chance to collect their thoughts and often draws out hesitant comments.</a:t>
+            </a:r>
+            <a:endParaRPr lang="en-US" sz="1800" dirty="0"/>
+          </a:p>
+        </p:txBody>
+      </p:sp>
+      <p:sp>
+        <p:nvSpPr>
+          <p:cNvPr id="27" name="Shape 20"/>
+          <p:cNvSpPr/>
+          <p:nvPr/>
+        </p:nvSpPr>
+        <p:spPr>
+          <a:xfrm>
+            <a:off x="8080248" y="3886200"/>
+            <a:ext cx="3605784" cy="2103120"/>
+          </a:xfrm>
+          <a:prstGeom prst="roundRect">
+            <a:avLst>
+              <a:gd name="adj" fmla="val 3913"/>
+            </a:avLst>
+          </a:prstGeom>
+          <a:solidFill>
+            <a:srgbClr val="FFFFFF"/>
+          </a:solidFill>
+          <a:ln w="12700">
+            <a:solidFill>
+              <a:srgbClr val="D5E3F2"/>
+            </a:solidFill>
+            <a:prstDash val="solid"/>
+          </a:ln>
+          <a:effectLst>
+            <a:outerShdw sx="100000" sy="100000" kx="0" ky="0" algn="bl" rotWithShape="0" blurRad="88900" dist="25400" dir="5400000">
+              <a:srgbClr val="9AB4CC">
+                <a:alpha val="30000"/>
+              </a:srgbClr>
+            </a:outerShdw>
+          </a:effectLst>
+        </p:spPr>
+      </p:sp>
+      <p:pic>
+        <p:nvPicPr>
+          <p:cNvPr id="28" name="Image 5" descr="preencoded.png">    </p:cNvPr>
+          <p:cNvPicPr>
+            <a:picLocks noChangeAspect="1"/>
+          </p:cNvPicPr>
+          <p:nvPr/>
+        </p:nvPicPr>
+        <p:blipFill>
+          <a:blip r:embed="rId11">
+            <a:extLst>
+              <a:ext uri="{96DAC541-7B7A-43D3-8B79-37D633B846F1}">
+                <asvg:svgBlip xmlns:asvg="http://schemas.microsoft.com/office/drawing/2016/SVG/main" r:embed="rId12"/>
+              </a:ext>
+            </a:extLst>
+          </a:blip>
+          <a:stretch>
+            <a:fillRect/>
+          </a:stretch>
+        </p:blipFill>
+        <p:spPr>
+          <a:xfrm>
+            <a:off x="8244840" y="4069080"/>
+            <a:ext cx="347472" cy="347472"/>
+          </a:xfrm>
+          <a:prstGeom prst="rect">
+            <a:avLst/>
+          </a:prstGeom>
+        </p:spPr>
+      </p:pic>
+      <p:sp>
+        <p:nvSpPr>
+          <p:cNvPr id="29" name="Text 21"/>
+          <p:cNvSpPr/>
+          <p:nvPr/>
+        </p:nvSpPr>
+        <p:spPr>
+          <a:xfrm>
+            <a:off x="8683752" y="3995928"/>
+            <a:ext cx="2837688" cy="777240"/>
+          </a:xfrm>
+          <a:prstGeom prst="rect">
+            <a:avLst/>
+          </a:prstGeom>
+          <a:noFill/>
+          <a:ln/>
+        </p:spPr>
+        <p:txBody>
+          <a:bodyPr wrap="square" rtlCol="0" anchor="ctr"/>
+          <a:lstStyle/>
+          <a:p>
+            <a:pPr indent="0" marL="0">
+              <a:lnSpc>
+                <a:spcPct val="100000"/>
+              </a:lnSpc>
+              <a:buNone/>
+            </a:pPr>
+            <a:r>
+              <a:rPr lang="en-US" sz="2000" b="1" dirty="0">
+                <a:solidFill>
+                  <a:srgbClr val="002050"/>
+                </a:solidFill>
+                <a:latin typeface="Aptos Display" pitchFamily="34" charset="0"/>
+                <a:ea typeface="Aptos Display" pitchFamily="34" charset="-122"/>
+                <a:cs typeface="Aptos Display" pitchFamily="34" charset="-120"/>
+              </a:rPr>
+              <a:t>Guide to closure</a:t>
+            </a:r>
+            <a:endParaRPr lang="en-US" sz="2000" dirty="0"/>
+          </a:p>
+        </p:txBody>
+      </p:sp>
+      <p:sp>
+        <p:nvSpPr>
+          <p:cNvPr id="30" name="Text 22"/>
+          <p:cNvSpPr/>
+          <p:nvPr/>
+        </p:nvSpPr>
+        <p:spPr>
+          <a:xfrm>
+            <a:off x="8244840" y="4818888"/>
+            <a:ext cx="3276600" cy="1042416"/>
+          </a:xfrm>
+          <a:prstGeom prst="rect">
+            <a:avLst/>
+          </a:prstGeom>
+          <a:noFill/>
+          <a:ln/>
+        </p:spPr>
+        <p:txBody>
+          <a:bodyPr wrap="square" rtlCol="0" anchor="t"/>
+          <a:lstStyle/>
+          <a:p>
+            <a:pPr indent="0" marL="0">
+              <a:lnSpc>
+                <a:spcPct val="110000"/>
+              </a:lnSpc>
+              <a:buNone/>
+            </a:pPr>
+            <a:r>
+              <a:rPr lang="en-US" sz="1800" dirty="0">
+                <a:solidFill>
+                  <a:srgbClr val="6B7280"/>
+                </a:solidFill>
+                <a:latin typeface="Aptos" pitchFamily="34" charset="0"/>
+                <a:ea typeface="Aptos" pitchFamily="34" charset="-122"/>
+                <a:cs typeface="Aptos" pitchFamily="34" charset="-120"/>
+              </a:rPr>
+              <a:t>Restate comments, ask for clarification, summarise what is agreed and what is left, and call the decision when it's time.</a:t>
+            </a:r>
+            <a:endParaRPr lang="en-US" sz="1800" dirty="0"/>
+          </a:p>
+        </p:txBody>
+      </p:sp>
+    </p:spTree>
+  </p:cSld>
+  <p:clrMapOvr>
+    <a:masterClrMapping/>
+  </p:clrMapOvr>
+</p:sld>
+</file>
+
+<file path=ppt/slides/slide8.xml><?xml version="1.0" encoding="utf-8"?>
+<p:sld xmlns:a="http://schemas.openxmlformats.org/drawingml/2006/main" xmlns:r="http://schemas.openxmlformats.org/officeDocument/2006/relationships" xmlns:p="http://schemas.openxmlformats.org/presentationml/2006/main">
+  <p:cSld name="Slide 8">
+    <p:bg>
+      <p:bgPr>
+        <a:solidFill>
+          <a:srgbClr val="FFFFFF"/>
+        </a:solidFill>
+      </p:bgPr>
+    </p:bg>
+    <p:spTree>
+      <p:nvGrpSpPr>
+        <p:cNvPr id="1" name=""/>
+        <p:cNvGrpSpPr/>
+        <p:nvPr/>
+      </p:nvGrpSpPr>
+      <p:grpSpPr>
+        <a:xfrm>
+          <a:off x="0" y="0"/>
+          <a:ext cx="0" cy="0"/>
+          <a:chOff x="0" y="0"/>
+          <a:chExt cx="0" cy="0"/>
+        </a:xfrm>
+      </p:grpSpPr>
+      <p:sp>
+        <p:nvSpPr>
+          <p:cNvPr id="2" name="Text 0"/>
+          <p:cNvSpPr/>
+          <p:nvPr/>
+        </p:nvSpPr>
+        <p:spPr>
+          <a:xfrm>
+            <a:off x="502920" y="6400800"/>
+            <a:ext cx="10268712" cy="347472"/>
+          </a:xfrm>
+          <a:prstGeom prst="rect">
+            <a:avLst/>
+          </a:prstGeom>
+          <a:noFill/>
+          <a:ln/>
+        </p:spPr>
+        <p:txBody>
+          <a:bodyPr wrap="square" rtlCol="0" anchor="ctr"/>
+          <a:lstStyle/>
+          <a:p>
+            <a:pPr indent="0" marL="0">
+              <a:buNone/>
+            </a:pPr>
+            <a:r>
+              <a:rPr lang="en-US" sz="1800" dirty="0">
+                <a:solidFill>
+                  <a:srgbClr val="6B7280"/>
+                </a:solidFill>
+                <a:latin typeface="Aptos" pitchFamily="34" charset="0"/>
+                <a:ea typeface="Aptos" pitchFamily="34" charset="-122"/>
+                <a:cs typeface="Aptos" pitchFamily="34" charset="-120"/>
+              </a:rPr>
+              <a:t>US 114051 · Conduct a technical practitioners meeting · NQF 5 · 4 credits</a:t>
+            </a:r>
+            <a:endParaRPr lang="en-US" sz="1800" dirty="0"/>
+          </a:p>
+        </p:txBody>
+      </p:sp>
+      <p:sp>
+        <p:nvSpPr>
+          <p:cNvPr id="3" name="Text 1"/>
+          <p:cNvSpPr/>
+          <p:nvPr/>
+        </p:nvSpPr>
+        <p:spPr>
+          <a:xfrm>
+            <a:off x="11045952" y="6400800"/>
+            <a:ext cx="640080" cy="347472"/>
+          </a:xfrm>
+          <a:prstGeom prst="rect">
+            <a:avLst/>
+          </a:prstGeom>
+          <a:noFill/>
+          <a:ln/>
+        </p:spPr>
+        <p:txBody>
+          <a:bodyPr wrap="square" rtlCol="0" anchor="ctr"/>
+          <a:lstStyle/>
+          <a:p>
+            <a:pPr algn="r" indent="0" marL="0">
+              <a:buNone/>
+            </a:pPr>
+            <a:r>
+              <a:rPr lang="en-US" sz="1800" dirty="0">
+                <a:solidFill>
+                  <a:srgbClr val="6B7280"/>
+                </a:solidFill>
+                <a:latin typeface="Aptos" pitchFamily="34" charset="0"/>
+                <a:ea typeface="Aptos" pitchFamily="34" charset="-122"/>
+                <a:cs typeface="Aptos" pitchFamily="34" charset="-120"/>
+              </a:rPr>
+              <a:t>8</a:t>
+            </a:r>
+            <a:endParaRPr lang="en-US" sz="1800" dirty="0"/>
+          </a:p>
+        </p:txBody>
+      </p:sp>
+      <p:sp>
+        <p:nvSpPr>
+          <p:cNvPr id="4" name="Shape 2"/>
+          <p:cNvSpPr/>
+          <p:nvPr/>
+        </p:nvSpPr>
+        <p:spPr>
+          <a:xfrm>
+            <a:off x="0" y="0"/>
+            <a:ext cx="12188952" cy="82296"/>
+          </a:xfrm>
+          <a:prstGeom prst="rect">
+            <a:avLst/>
+          </a:prstGeom>
+          <a:solidFill>
+            <a:srgbClr val="0F6CBD"/>
+          </a:solidFill>
+          <a:ln/>
+        </p:spPr>
+      </p:sp>
+      <p:sp>
+        <p:nvSpPr>
+          <p:cNvPr id="5" name="Text 3"/>
+          <p:cNvSpPr/>
+          <p:nvPr/>
+        </p:nvSpPr>
+        <p:spPr>
+          <a:xfrm>
+            <a:off x="502920" y="237744"/>
+            <a:ext cx="11183112" cy="347472"/>
+          </a:xfrm>
+          <a:prstGeom prst="rect">
+            <a:avLst/>
+          </a:prstGeom>
+          <a:noFill/>
+          <a:ln/>
+        </p:spPr>
+        <p:txBody>
+          <a:bodyPr wrap="square" rtlCol="0" anchor="ctr"/>
+          <a:lstStyle/>
+          <a:p>
+            <a:pPr indent="0" marL="0">
+              <a:buNone/>
+            </a:pPr>
+            <a:r>
+              <a:rPr lang="en-US" sz="1800" b="1" spc="200" kern="0" dirty="0">
+                <a:solidFill>
+                  <a:srgbClr val="0F6CBD"/>
+                </a:solidFill>
+                <a:latin typeface="Aptos" pitchFamily="34" charset="0"/>
+                <a:ea typeface="Aptos" pitchFamily="34" charset="-122"/>
+                <a:cs typeface="Aptos" pitchFamily="34" charset="-120"/>
+              </a:rPr>
+              <a:t>CHAIR THE MEETING</a:t>
+            </a:r>
+            <a:endParaRPr lang="en-US" sz="1800" dirty="0"/>
+          </a:p>
+        </p:txBody>
+      </p:sp>
+      <p:sp>
+        <p:nvSpPr>
+          <p:cNvPr id="6" name="Text 4"/>
+          <p:cNvSpPr/>
+          <p:nvPr/>
+        </p:nvSpPr>
+        <p:spPr>
+          <a:xfrm>
+            <a:off x="502920" y="585216"/>
+            <a:ext cx="11183112" cy="603504"/>
+          </a:xfrm>
+          <a:prstGeom prst="rect">
+            <a:avLst/>
+          </a:prstGeom>
+          <a:noFill/>
+          <a:ln/>
+        </p:spPr>
+        <p:txBody>
+          <a:bodyPr wrap="square" rtlCol="0" anchor="ctr"/>
+          <a:lstStyle/>
+          <a:p>
+            <a:pPr indent="0" marL="0">
+              <a:buNone/>
+            </a:pPr>
+            <a:r>
+              <a:rPr lang="en-US" sz="3000" b="1" dirty="0">
+                <a:solidFill>
+                  <a:srgbClr val="002050"/>
+                </a:solidFill>
+                <a:latin typeface="Aptos Display" pitchFamily="34" charset="0"/>
+                <a:ea typeface="Aptos Display" pitchFamily="34" charset="-122"/>
+                <a:cs typeface="Aptos Display" pitchFamily="34" charset="-120"/>
+              </a:rPr>
+              <a:t>Participation, priorities and staying on course</a:t>
+            </a:r>
+            <a:endParaRPr lang="en-US" sz="3000" dirty="0"/>
+          </a:p>
+        </p:txBody>
+      </p:sp>
+      <p:sp>
+        <p:nvSpPr>
+          <p:cNvPr id="7" name="Text 5"/>
+          <p:cNvSpPr/>
+          <p:nvPr/>
+        </p:nvSpPr>
+        <p:spPr>
+          <a:xfrm>
+            <a:off x="502920" y="1554480"/>
+            <a:ext cx="11183112" cy="4572000"/>
+          </a:xfrm>
+          <a:prstGeom prst="rect">
+            <a:avLst/>
+          </a:prstGeom>
+          <a:noFill/>
+          <a:ln/>
+        </p:spPr>
+        <p:txBody>
+          <a:bodyPr wrap="square" rtlCol="0" anchor="t"/>
+          <a:lstStyle/>
+          <a:p>
+            <a:pPr marL="203200" indent="-203200">
+              <a:lnSpc>
+                <a:spcPct val="120000"/>
+              </a:lnSpc>
+              <a:spcAft>
+                <a:spcPts val="1000"/>
+              </a:spcAft>
+              <a:buSzPct val="100000"/>
+              <a:buChar char="•"/>
+            </a:pPr>
+            <a:r>
+              <a:rPr lang="en-US" sz="1800" dirty="0">
+                <a:solidFill>
+                  <a:srgbClr val="002050"/>
+                </a:solidFill>
+                <a:latin typeface="Aptos" pitchFamily="34" charset="0"/>
+                <a:ea typeface="Aptos" pitchFamily="34" charset="-122"/>
+                <a:cs typeface="Aptos" pitchFamily="34" charset="-120"/>
+              </a:rPr>
+              <a:t>Provide for active participation by ALL members — invite quiet members by name and draw the whole group into the discussion; that is how conflict is minimised.</a:t>
+            </a:r>
+            <a:endParaRPr lang="en-US" sz="1800" dirty="0"/>
+          </a:p>
+          <a:p>
+            <a:pPr marL="203200" indent="-203200">
+              <a:lnSpc>
+                <a:spcPct val="120000"/>
+              </a:lnSpc>
+              <a:spcAft>
+                <a:spcPts val="1000"/>
+              </a:spcAft>
+              <a:buSzPct val="100000"/>
+              <a:buChar char="•"/>
+            </a:pPr>
+            <a:r>
+              <a:rPr lang="en-US" sz="1800" dirty="0">
+                <a:solidFill>
+                  <a:srgbClr val="002050"/>
+                </a:solidFill>
+                <a:latin typeface="Aptos" pitchFamily="34" charset="0"/>
+                <a:ea typeface="Aptos" pitchFamily="34" charset="-122"/>
+                <a:cs typeface="Aptos" pitchFamily="34" charset="-120"/>
+              </a:rPr>
+              <a:t>Prioritise topics and allocate discussion time according to importance, urgency, complexity and the agenda.</a:t>
+            </a:r>
+            <a:endParaRPr lang="en-US" sz="1800" dirty="0"/>
+          </a:p>
+          <a:p>
+            <a:pPr marL="203200" indent="-203200">
+              <a:lnSpc>
+                <a:spcPct val="120000"/>
+              </a:lnSpc>
+              <a:spcAft>
+                <a:spcPts val="1000"/>
+              </a:spcAft>
+              <a:buSzPct val="100000"/>
+              <a:buChar char="•"/>
+            </a:pPr>
+            <a:r>
+              <a:rPr lang="en-US" sz="1800" dirty="0">
+                <a:solidFill>
+                  <a:srgbClr val="002050"/>
+                </a:solidFill>
+                <a:latin typeface="Aptos" pitchFamily="34" charset="0"/>
+                <a:ea typeface="Aptos" pitchFamily="34" charset="-122"/>
+                <a:cs typeface="Aptos" pitchFamily="34" charset="-120"/>
+              </a:rPr>
+              <a:t>If discussion strays off-topic, point it out and redirect it back on course; agree a time limit when a discussion threatens to run away.</a:t>
+            </a:r>
+            <a:endParaRPr lang="en-US" sz="1800" dirty="0"/>
+          </a:p>
+          <a:p>
+            <a:pPr marL="203200" indent="-203200">
+              <a:lnSpc>
+                <a:spcPct val="120000"/>
+              </a:lnSpc>
+              <a:spcAft>
+                <a:spcPts val="1000"/>
+              </a:spcAft>
+              <a:buSzPct val="100000"/>
+              <a:buChar char="•"/>
+            </a:pPr>
+            <a:r>
+              <a:rPr lang="en-US" sz="1800" dirty="0">
+                <a:solidFill>
+                  <a:srgbClr val="002050"/>
+                </a:solidFill>
+                <a:latin typeface="Aptos" pitchFamily="34" charset="0"/>
+                <a:ea typeface="Aptos" pitchFamily="34" charset="-122"/>
+                <a:cs typeface="Aptos" pitchFamily="34" charset="-120"/>
+              </a:rPr>
+              <a:t>If the group is only repeating itself, restate and summarise the issues and ask if people are ready to decide — or table the matter, ask someone to bring more information, or form a committee.</a:t>
+            </a:r>
+            <a:endParaRPr lang="en-US" sz="1800" dirty="0"/>
+          </a:p>
+          <a:p>
+            <a:pPr marL="203200" indent="-203200">
+              <a:lnSpc>
+                <a:spcPct val="120000"/>
+              </a:lnSpc>
+              <a:spcAft>
+                <a:spcPts val="1000"/>
+              </a:spcAft>
+              <a:buSzPct val="100000"/>
+              <a:buChar char="•"/>
+            </a:pPr>
+            <a:r>
+              <a:rPr lang="en-US" sz="1800" dirty="0">
+                <a:solidFill>
+                  <a:srgbClr val="002050"/>
+                </a:solidFill>
+                <a:latin typeface="Aptos" pitchFamily="34" charset="0"/>
+                <a:ea typeface="Aptos" pitchFamily="34" charset="-122"/>
+                <a:cs typeface="Aptos" pitchFamily="34" charset="-120"/>
+              </a:rPr>
+              <a:t>If a decision is too contentious, postpone it to the next meeting so people can think things over — and calm down.</a:t>
+            </a:r>
+            <a:endParaRPr lang="en-US" sz="1800" dirty="0"/>
+          </a:p>
+          <a:p>
+            <a:pPr marL="203200" indent="-203200">
+              <a:lnSpc>
+                <a:spcPct val="120000"/>
+              </a:lnSpc>
+              <a:spcAft>
+                <a:spcPts val="1000"/>
+              </a:spcAft>
+              <a:buSzPct val="100000"/>
+              <a:buChar char="•"/>
+            </a:pPr>
+            <a:r>
+              <a:rPr lang="en-US" sz="1800" dirty="0">
+                <a:solidFill>
+                  <a:srgbClr val="002050"/>
+                </a:solidFill>
+                <a:latin typeface="Aptos" pitchFamily="34" charset="0"/>
+                <a:ea typeface="Aptos" pitchFamily="34" charset="-122"/>
+                <a:cs typeface="Aptos" pitchFamily="34" charset="-120"/>
+              </a:rPr>
+              <a:t>Ensure agreed decisions are clear, accurate, include a time frame for action, and are within the mandate of the type of meeting conducted.</a:t>
+            </a:r>
+            <a:endParaRPr lang="en-US" sz="1800" dirty="0"/>
+          </a:p>
+          <a:p>
+            <a:pPr marL="203200" indent="-203200">
+              <a:lnSpc>
+                <a:spcPct val="120000"/>
+              </a:lnSpc>
+              <a:spcAft>
+                <a:spcPts val="1000"/>
+              </a:spcAft>
+              <a:buSzPct val="100000"/>
+              <a:buChar char="•"/>
+            </a:pPr>
+            <a:r>
+              <a:rPr lang="en-US" sz="1800" dirty="0">
+                <a:solidFill>
+                  <a:srgbClr val="002050"/>
+                </a:solidFill>
+                <a:latin typeface="Aptos" pitchFamily="34" charset="0"/>
+                <a:ea typeface="Aptos" pitchFamily="34" charset="-122"/>
+                <a:cs typeface="Aptos" pitchFamily="34" charset="-120"/>
+              </a:rPr>
+              <a:t>Take time at the end to process: what went well, lingering concerns — and END ON TIME; nothing makes people dread meetings more than overruns.</a:t>
+            </a:r>
+            <a:endParaRPr lang="en-US" sz="1800" dirty="0"/>
+          </a:p>
+        </p:txBody>
+      </p:sp>
+    </p:spTree>
+  </p:cSld>
+  <p:clrMapOvr>
+    <a:masterClrMapping/>
+  </p:clrMapOvr>
+</p:sld>
+</file>
+
+<file path=ppt/slides/slide9.xml><?xml version="1.0" encoding="utf-8"?>
+<p:sld xmlns:a="http://schemas.openxmlformats.org/drawingml/2006/main" xmlns:r="http://schemas.openxmlformats.org/officeDocument/2006/relationships" xmlns:p="http://schemas.openxmlformats.org/presentationml/2006/main">
+  <p:cSld name="Slide 9">
+    <p:bg>
+      <p:bgPr>
+        <a:solidFill>
+          <a:srgbClr val="FFFFFF"/>
+        </a:solidFill>
+      </p:bgPr>
+    </p:bg>
+    <p:spTree>
+      <p:nvGrpSpPr>
+        <p:cNvPr id="1" name=""/>
+        <p:cNvGrpSpPr/>
+        <p:nvPr/>
+      </p:nvGrpSpPr>
+      <p:grpSpPr>
+        <a:xfrm>
+          <a:off x="0" y="0"/>
+          <a:ext cx="0" cy="0"/>
+          <a:chOff x="0" y="0"/>
+          <a:chExt cx="0" cy="0"/>
+        </a:xfrm>
+      </p:grpSpPr>
+      <p:sp>
+        <p:nvSpPr>
+          <p:cNvPr id="2" name="Text 0"/>
+          <p:cNvSpPr/>
+          <p:nvPr/>
+        </p:nvSpPr>
+        <p:spPr>
+          <a:xfrm>
+            <a:off x="502920" y="6400800"/>
+            <a:ext cx="10268712" cy="347472"/>
+          </a:xfrm>
+          <a:prstGeom prst="rect">
+            <a:avLst/>
+          </a:prstGeom>
+          <a:noFill/>
+          <a:ln/>
+        </p:spPr>
+        <p:txBody>
+          <a:bodyPr wrap="square" rtlCol="0" anchor="ctr"/>
+          <a:lstStyle/>
+          <a:p>
+            <a:pPr indent="0" marL="0">
+              <a:buNone/>
+            </a:pPr>
+            <a:r>
+              <a:rPr lang="en-US" sz="1800" dirty="0">
+                <a:solidFill>
+                  <a:srgbClr val="6B7280"/>
+                </a:solidFill>
+                <a:latin typeface="Aptos" pitchFamily="34" charset="0"/>
+                <a:ea typeface="Aptos" pitchFamily="34" charset="-122"/>
+                <a:cs typeface="Aptos" pitchFamily="34" charset="-120"/>
+              </a:rPr>
+              <a:t>US 114051 · Conduct a technical practitioners meeting · NQF 5 · 4 credits</a:t>
+            </a:r>
+            <a:endParaRPr lang="en-US" sz="1800" dirty="0"/>
+          </a:p>
+        </p:txBody>
+      </p:sp>
+      <p:sp>
+        <p:nvSpPr>
+          <p:cNvPr id="3" name="Text 1"/>
+          <p:cNvSpPr/>
+          <p:nvPr/>
+        </p:nvSpPr>
+        <p:spPr>
+          <a:xfrm>
+            <a:off x="11045952" y="6400800"/>
+            <a:ext cx="640080" cy="347472"/>
+          </a:xfrm>
+          <a:prstGeom prst="rect">
+            <a:avLst/>
+          </a:prstGeom>
+          <a:noFill/>
+          <a:ln/>
+        </p:spPr>
+        <p:txBody>
+          <a:bodyPr wrap="square" rtlCol="0" anchor="ctr"/>
+          <a:lstStyle/>
+          <a:p>
+            <a:pPr algn="r" indent="0" marL="0">
+              <a:buNone/>
+            </a:pPr>
+            <a:r>
+              <a:rPr lang="en-US" sz="1800" dirty="0">
+                <a:solidFill>
+                  <a:srgbClr val="6B7280"/>
+                </a:solidFill>
+                <a:latin typeface="Aptos" pitchFamily="34" charset="0"/>
+                <a:ea typeface="Aptos" pitchFamily="34" charset="-122"/>
+                <a:cs typeface="Aptos" pitchFamily="34" charset="-120"/>
+              </a:rPr>
+              <a:t>9</a:t>
+            </a:r>
+            <a:endParaRPr lang="en-US" sz="1800" dirty="0"/>
+          </a:p>
+        </p:txBody>
+      </p:sp>
+      <p:sp>
+        <p:nvSpPr>
+          <p:cNvPr id="4" name="Shape 2"/>
+          <p:cNvSpPr/>
+          <p:nvPr/>
+        </p:nvSpPr>
+        <p:spPr>
+          <a:xfrm>
+            <a:off x="0" y="0"/>
+            <a:ext cx="12188952" cy="82296"/>
+          </a:xfrm>
+          <a:prstGeom prst="rect">
+            <a:avLst/>
+          </a:prstGeom>
+          <a:solidFill>
+            <a:srgbClr val="0F6CBD"/>
+          </a:solidFill>
+          <a:ln/>
+        </p:spPr>
+      </p:sp>
+      <p:sp>
+        <p:nvSpPr>
+          <p:cNvPr id="5" name="Text 3"/>
+          <p:cNvSpPr/>
+          <p:nvPr/>
+        </p:nvSpPr>
+        <p:spPr>
+          <a:xfrm>
+            <a:off x="502920" y="237744"/>
+            <a:ext cx="11183112" cy="347472"/>
+          </a:xfrm>
+          <a:prstGeom prst="rect">
+            <a:avLst/>
+          </a:prstGeom>
+          <a:noFill/>
+          <a:ln/>
+        </p:spPr>
+        <p:txBody>
+          <a:bodyPr wrap="square" rtlCol="0" anchor="ctr"/>
+          <a:lstStyle/>
+          <a:p>
+            <a:pPr indent="0" marL="0">
+              <a:buNone/>
+            </a:pPr>
+            <a:r>
+              <a:rPr lang="en-US" sz="1800" b="1" spc="200" kern="0" dirty="0">
+                <a:solidFill>
+                  <a:srgbClr val="0F6CBD"/>
+                </a:solidFill>
+                <a:latin typeface="Aptos" pitchFamily="34" charset="0"/>
+                <a:ea typeface="Aptos" pitchFamily="34" charset="-122"/>
+                <a:cs typeface="Aptos" pitchFamily="34" charset="-120"/>
+              </a:rPr>
+              <a:t>CHAIR THE MEETING</a:t>
+            </a:r>
+            <a:endParaRPr lang="en-US" sz="1800" dirty="0"/>
+          </a:p>
+        </p:txBody>
+      </p:sp>
+      <p:sp>
+        <p:nvSpPr>
+          <p:cNvPr id="6" name="Text 4"/>
+          <p:cNvSpPr/>
+          <p:nvPr/>
+        </p:nvSpPr>
+        <p:spPr>
+          <a:xfrm>
+            <a:off x="502920" y="585216"/>
+            <a:ext cx="11183112" cy="603504"/>
+          </a:xfrm>
+          <a:prstGeom prst="rect">
+            <a:avLst/>
+          </a:prstGeom>
+          <a:noFill/>
+          <a:ln/>
+        </p:spPr>
+        <p:txBody>
+          <a:bodyPr wrap="square" rtlCol="0" anchor="ctr"/>
+          <a:lstStyle/>
+          <a:p>
+            <a:pPr indent="0" marL="0">
+              <a:buNone/>
+            </a:pPr>
+            <a:r>
+              <a:rPr lang="en-US" sz="3000" b="1" dirty="0">
+                <a:solidFill>
+                  <a:srgbClr val="002050"/>
+                </a:solidFill>
+                <a:latin typeface="Aptos Display" pitchFamily="34" charset="0"/>
+                <a:ea typeface="Aptos Display" pitchFamily="34" charset="-122"/>
+                <a:cs typeface="Aptos Display" pitchFamily="34" charset="-120"/>
+              </a:rPr>
               <a:t>Managing difficult behaviours</a:t>
             </a:r>
             <a:endParaRPr lang="en-US" sz="3000" dirty="0"/>
@@ -4299,7 +7921,7 @@
       </p:sp>
       <p:graphicFrame>
         <p:nvGraphicFramePr>
-          <p:cNvPr id="6" name="Table 0"/>
+          <p:cNvPr id="10" name="Table 0"/>
           <p:cNvGraphicFramePr>
             <a:graphicFrameLocks noGrp="1"/>
           </p:cNvGraphicFramePr>
@@ -4547,7 +8169,7 @@
                           <a:ea typeface="Aptos" pitchFamily="34" charset="-122"/>
                           <a:cs typeface="Aptos" pitchFamily="34" charset="-120"/>
                         </a:rPr>
-                        <a:t>Stay calm; acknowledge any valid point and return to the agenda and agreed rules.</a:t>
+                        <a:t>Aggressive and argumentative — stay calm, find merit in one point, express agreement, move on.</a:t>
                       </a:r>
                       <a:endParaRPr lang="en-US" sz="1800" dirty="0">
                         <a:latin typeface="Aptos" charset="0"/>
@@ -4617,7 +8239,7 @@
                           <a:ea typeface="Aptos" pitchFamily="34" charset="-122"/>
                           <a:cs typeface="Aptos" pitchFamily="34" charset="-120"/>
                         </a:rPr>
-                        <a:t>The overly talkative</a:t>
+                        <a:t>The one who won't shut up</a:t>
                       </a:r>
                       <a:endParaRPr lang="en-US" sz="1800" dirty="0">
                         <a:latin typeface="Aptos" charset="0"/>
@@ -4685,7 +8307,7 @@
                           <a:ea typeface="Aptos" pitchFamily="34" charset="-122"/>
                           <a:cs typeface="Aptos" pitchFamily="34" charset="-120"/>
                         </a:rPr>
-                        <a:t>Thank them, summarise their point, and invite someone who has not yet spoken.</a:t>
+                        <a:t>Eager-beaver, show-off, well-informed or just talkative — wait for a breath, thank them, ask to hear from someone else; toss misstatements back to the group.</a:t>
                       </a:r>
                       <a:endParaRPr lang="en-US" sz="1800" dirty="0">
                         <a:latin typeface="Aptos" charset="0"/>
@@ -4823,7 +8445,7 @@
                           <a:ea typeface="Aptos" pitchFamily="34" charset="-122"/>
                           <a:cs typeface="Aptos" pitchFamily="34" charset="-120"/>
                         </a:rPr>
-                        <a:t>Ask for evidence and an alternative — turn the criticism into an agenda item or action.</a:t>
+                        <a:t>May gripe at random or have a real complaint — point out the meeting seeks better ways by constructive cooperation; let a group member answer.</a:t>
                       </a:r>
                       <a:endParaRPr lang="en-US" sz="1800" dirty="0">
                         <a:latin typeface="Aptos" charset="0"/>
@@ -4893,7 +8515,7 @@
                           <a:ea typeface="Aptos" pitchFamily="34" charset="-122"/>
                           <a:cs typeface="Aptos" pitchFamily="34" charset="-120"/>
                         </a:rPr>
-                        <a:t>The silent member</a:t>
+                        <a:t>The silent one</a:t>
                       </a:r>
                       <a:endParaRPr lang="en-US" sz="1800" dirty="0">
                         <a:latin typeface="Aptos" charset="0"/>
@@ -4961,7 +8583,7 @@
                           <a:ea typeface="Aptos" pitchFamily="34" charset="-122"/>
                           <a:cs typeface="Aptos" pitchFamily="34" charset="-120"/>
                         </a:rPr>
-                        <a:t>Invite their input by name on a topic they know well.</a:t>
+                        <a:t>Bored, shy or uncertain — ask directly for their opinion, show respect for their experience, encourage their first contribution; never force them.</a:t>
                       </a:r>
                       <a:endParaRPr lang="en-US" sz="1800" dirty="0">
                         <a:latin typeface="Aptos" charset="0"/>
@@ -5031,7 +8653,7 @@
                           <a:ea typeface="Aptos" pitchFamily="34" charset="-122"/>
                           <a:cs typeface="Aptos" pitchFamily="34" charset="-120"/>
                         </a:rPr>
-                        <a:t>Conflicting egos</a:t>
+                        <a:t>The egos</a:t>
                       </a:r>
                       <a:endParaRPr lang="en-US" sz="1800" dirty="0">
                         <a:latin typeface="Aptos" charset="0"/>
@@ -5099,7 +8721,7 @@
                           <a:ea typeface="Aptos" pitchFamily="34" charset="-122"/>
                           <a:cs typeface="Aptos" pitchFamily="34" charset="-120"/>
                         </a:rPr>
-                        <a:t>Keep debate on the issue, not the person; restate the meeting's outcomes.</a:t>
+                        <a:t>Personalities clash — compliment their enthusiasm, ask for constructive solutions, emphasise points they agree on, throw a question to the rest.</a:t>
                       </a:r>
                       <a:endParaRPr lang="en-US" sz="1800" dirty="0">
                         <a:latin typeface="Aptos" charset="0"/>
@@ -5169,7 +8791,7 @@
                           <a:ea typeface="Aptos" pitchFamily="34" charset="-122"/>
                           <a:cs typeface="Aptos" pitchFamily="34" charset="-120"/>
                         </a:rPr>
-                        <a:t>Side conversations</a:t>
+                        <a:t>The chatty couple</a:t>
                       </a:r>
                       <a:endParaRPr lang="en-US" sz="1800" dirty="0">
                         <a:latin typeface="Aptos" charset="0"/>
@@ -5237,7 +8859,7 @@
                           <a:ea typeface="Aptos" pitchFamily="34" charset="-122"/>
                           <a:cs typeface="Aptos" pitchFamily="34" charset="-120"/>
                         </a:rPr>
-                        <a:t>Pause the meeting and draw the conversation back to the floor.</a:t>
+                        <a:t>Side conversations — remind them of the debate, draw them back with an easy question and a recap of what was just discussed.</a:t>
                       </a:r>
                       <a:endParaRPr lang="en-US" sz="1800" dirty="0">
                         <a:latin typeface="Aptos" charset="0"/>
@@ -5307,7 +8929,7 @@
                           <a:ea typeface="Aptos" pitchFamily="34" charset="-122"/>
                           <a:cs typeface="Aptos" pitchFamily="34" charset="-120"/>
                         </a:rPr>
-                        <a:t>Factually wrong statements</a:t>
+                        <a:t>The one who is defiantly wrong</a:t>
                       </a:r>
                       <a:endParaRPr lang="en-US" sz="1800" dirty="0">
                         <a:latin typeface="Aptos" charset="0"/>
@@ -5375,7 +8997,7 @@
                           <a:ea typeface="Aptos" pitchFamily="34" charset="-122"/>
                           <a:cs typeface="Aptos" pitchFamily="34" charset="-120"/>
                         </a:rPr>
-                        <a:t>Correct tactfully with the facts — or park the point for verification and record it.</a:t>
+                        <a:t>Confused or misinformed — tactfully restate their point to show the error, or leave the debate open for the group to correct it.</a:t>
                       </a:r>
                       <a:endParaRPr lang="en-US" sz="1800" dirty="0">
                         <a:latin typeface="Aptos" charset="0"/>
@@ -5431,958 +9053,6 @@
           </a:graphicData>
         </a:graphic>
       </p:graphicFrame>
-    </p:spTree>
-  </p:cSld>
-  <p:clrMapOvr>
-    <a:masterClrMapping/>
-  </p:clrMapOvr>
-</p:sld>
-</file>
-
-<file path=ppt/slides/slide6.xml><?xml version="1.0" encoding="utf-8"?>
-<p:sld xmlns:a="http://schemas.openxmlformats.org/drawingml/2006/main" xmlns:r="http://schemas.openxmlformats.org/officeDocument/2006/relationships" xmlns:p="http://schemas.openxmlformats.org/presentationml/2006/main">
-  <p:cSld name="Slide 6">
-    <p:bg>
-      <p:bgPr>
-        <a:solidFill>
-          <a:srgbClr val="FFFFFF"/>
-        </a:solidFill>
-      </p:bgPr>
-    </p:bg>
-    <p:spTree>
-      <p:nvGrpSpPr>
-        <p:cNvPr id="1" name=""/>
-        <p:cNvGrpSpPr/>
-        <p:nvPr/>
-      </p:nvGrpSpPr>
-      <p:grpSpPr>
-        <a:xfrm>
-          <a:off x="0" y="0"/>
-          <a:ext cx="0" cy="0"/>
-          <a:chOff x="0" y="0"/>
-          <a:chExt cx="0" cy="0"/>
-        </a:xfrm>
-      </p:grpSpPr>
-      <p:sp>
-        <p:nvSpPr>
-          <p:cNvPr id="2" name="Text 0"/>
-          <p:cNvSpPr/>
-          <p:nvPr/>
-        </p:nvSpPr>
-        <p:spPr>
-          <a:xfrm>
-            <a:off x="502920" y="6400800"/>
-            <a:ext cx="10268712" cy="347472"/>
-          </a:xfrm>
-          <a:prstGeom prst="rect">
-            <a:avLst/>
-          </a:prstGeom>
-          <a:noFill/>
-          <a:ln/>
-        </p:spPr>
-        <p:txBody>
-          <a:bodyPr wrap="square" rtlCol="0" anchor="ctr"/>
-          <a:lstStyle/>
-          <a:p>
-            <a:pPr indent="0" marL="0">
-              <a:buNone/>
-            </a:pPr>
-            <a:r>
-              <a:rPr lang="en-US" sz="1800" dirty="0">
-                <a:solidFill>
-                  <a:srgbClr val="6B7280"/>
-                </a:solidFill>
-                <a:latin typeface="Aptos" pitchFamily="34" charset="0"/>
-                <a:ea typeface="Aptos" pitchFamily="34" charset="-122"/>
-                <a:cs typeface="Aptos" pitchFamily="34" charset="-120"/>
-              </a:rPr>
-              <a:t>US 114051 · Conduct a technical practitioners meeting · NQF 5 · 4 credits</a:t>
-            </a:r>
-            <a:endParaRPr lang="en-US" sz="1800" dirty="0"/>
-          </a:p>
-        </p:txBody>
-      </p:sp>
-      <p:sp>
-        <p:nvSpPr>
-          <p:cNvPr id="3" name="Text 1"/>
-          <p:cNvSpPr/>
-          <p:nvPr/>
-        </p:nvSpPr>
-        <p:spPr>
-          <a:xfrm>
-            <a:off x="11045952" y="6400800"/>
-            <a:ext cx="640080" cy="347472"/>
-          </a:xfrm>
-          <a:prstGeom prst="rect">
-            <a:avLst/>
-          </a:prstGeom>
-          <a:noFill/>
-          <a:ln/>
-        </p:spPr>
-        <p:txBody>
-          <a:bodyPr wrap="square" rtlCol="0" anchor="ctr"/>
-          <a:lstStyle/>
-          <a:p>
-            <a:pPr algn="r" indent="0" marL="0">
-              <a:buNone/>
-            </a:pPr>
-            <a:r>
-              <a:rPr lang="en-US" sz="1800" dirty="0">
-                <a:solidFill>
-                  <a:srgbClr val="6B7280"/>
-                </a:solidFill>
-                <a:latin typeface="Aptos" pitchFamily="34" charset="0"/>
-                <a:ea typeface="Aptos" pitchFamily="34" charset="-122"/>
-                <a:cs typeface="Aptos" pitchFamily="34" charset="-120"/>
-              </a:rPr>
-              <a:t>6</a:t>
-            </a:r>
-            <a:endParaRPr lang="en-US" sz="1800" dirty="0"/>
-          </a:p>
-        </p:txBody>
-      </p:sp>
-      <p:sp>
-        <p:nvSpPr>
-          <p:cNvPr id="4" name="Shape 2"/>
-          <p:cNvSpPr/>
-          <p:nvPr/>
-        </p:nvSpPr>
-        <p:spPr>
-          <a:xfrm>
-            <a:off x="0" y="0"/>
-            <a:ext cx="12188952" cy="82296"/>
-          </a:xfrm>
-          <a:prstGeom prst="rect">
-            <a:avLst/>
-          </a:prstGeom>
-          <a:solidFill>
-            <a:srgbClr val="0F6CBD"/>
-          </a:solidFill>
-          <a:ln/>
-        </p:spPr>
-      </p:sp>
-      <p:sp>
-        <p:nvSpPr>
-          <p:cNvPr id="5" name="Text 3"/>
-          <p:cNvSpPr/>
-          <p:nvPr/>
-        </p:nvSpPr>
-        <p:spPr>
-          <a:xfrm>
-            <a:off x="502920" y="237744"/>
-            <a:ext cx="11183112" cy="347472"/>
-          </a:xfrm>
-          <a:prstGeom prst="rect">
-            <a:avLst/>
-          </a:prstGeom>
-          <a:noFill/>
-          <a:ln/>
-        </p:spPr>
-        <p:txBody>
-          <a:bodyPr wrap="square" rtlCol="0" anchor="ctr"/>
-          <a:lstStyle/>
-          <a:p>
-            <a:pPr indent="0" marL="0">
-              <a:buNone/>
-            </a:pPr>
-            <a:r>
-              <a:rPr lang="en-US" sz="1800" b="1" spc="200" kern="0" dirty="0">
-                <a:solidFill>
-                  <a:srgbClr val="0F6CBD"/>
-                </a:solidFill>
-                <a:latin typeface="Aptos" pitchFamily="34" charset="0"/>
-                <a:ea typeface="Aptos" pitchFamily="34" charset="-122"/>
-                <a:cs typeface="Aptos" pitchFamily="34" charset="-120"/>
-              </a:rPr>
-              <a:t>NOW PROVE IT</a:t>
-            </a:r>
-            <a:endParaRPr lang="en-US" sz="1800" dirty="0"/>
-          </a:p>
-        </p:txBody>
-      </p:sp>
-      <p:sp>
-        <p:nvSpPr>
-          <p:cNvPr id="6" name="Text 4"/>
-          <p:cNvSpPr/>
-          <p:nvPr/>
-        </p:nvSpPr>
-        <p:spPr>
-          <a:xfrm>
-            <a:off x="502920" y="585216"/>
-            <a:ext cx="11183112" cy="603504"/>
-          </a:xfrm>
-          <a:prstGeom prst="rect">
-            <a:avLst/>
-          </a:prstGeom>
-          <a:noFill/>
-          <a:ln/>
-        </p:spPr>
-        <p:txBody>
-          <a:bodyPr wrap="square" rtlCol="0" anchor="ctr"/>
-          <a:lstStyle/>
-          <a:p>
-            <a:pPr indent="0" marL="0">
-              <a:buNone/>
-            </a:pPr>
-            <a:r>
-              <a:rPr lang="en-US" sz="3000" b="1" dirty="0">
-                <a:solidFill>
-                  <a:srgbClr val="002050"/>
-                </a:solidFill>
-                <a:latin typeface="Aptos Display" pitchFamily="34" charset="0"/>
-                <a:ea typeface="Aptos Display" pitchFamily="34" charset="-122"/>
-                <a:cs typeface="Aptos Display" pitchFamily="34" charset="-120"/>
-              </a:rPr>
-              <a:t>Your work for Specific Outcome 3</a:t>
-            </a:r>
-            <a:endParaRPr lang="en-US" sz="3000" dirty="0"/>
-          </a:p>
-        </p:txBody>
-      </p:sp>
-      <p:sp>
-        <p:nvSpPr>
-          <p:cNvPr id="7" name="Shape 5"/>
-          <p:cNvSpPr/>
-          <p:nvPr/>
-        </p:nvSpPr>
-        <p:spPr>
-          <a:xfrm>
-            <a:off x="502920" y="1828800"/>
-            <a:ext cx="3605784" cy="2651760"/>
-          </a:xfrm>
-          <a:prstGeom prst="roundRect">
-            <a:avLst>
-              <a:gd name="adj" fmla="val 3103"/>
-            </a:avLst>
-          </a:prstGeom>
-          <a:solidFill>
-            <a:srgbClr val="FFFFFF"/>
-          </a:solidFill>
-          <a:ln w="12700">
-            <a:solidFill>
-              <a:srgbClr val="D5E3F2"/>
-            </a:solidFill>
-            <a:prstDash val="solid"/>
-          </a:ln>
-          <a:effectLst>
-            <a:outerShdw sx="100000" sy="100000" kx="0" ky="0" algn="bl" rotWithShape="0" blurRad="88900" dist="25400" dir="5400000">
-              <a:srgbClr val="9AB4CC">
-                <a:alpha val="30000"/>
-              </a:srgbClr>
-            </a:outerShdw>
-          </a:effectLst>
-        </p:spPr>
-      </p:sp>
-      <p:pic>
-        <p:nvPicPr>
-          <p:cNvPr id="8" name="Image 0" descr="preencoded.png">    </p:cNvPr>
-          <p:cNvPicPr>
-            <a:picLocks noChangeAspect="1"/>
-          </p:cNvPicPr>
-          <p:nvPr/>
-        </p:nvPicPr>
-        <p:blipFill>
-          <a:blip r:embed="rId1">
-            <a:extLst>
-              <a:ext uri="{96DAC541-7B7A-43D3-8B79-37D633B846F1}">
-                <asvg:svgBlip xmlns:asvg="http://schemas.microsoft.com/office/drawing/2016/SVG/main" r:embed="rId2"/>
-              </a:ext>
-            </a:extLst>
-          </a:blip>
-          <a:stretch>
-            <a:fillRect/>
-          </a:stretch>
-        </p:blipFill>
-        <p:spPr>
-          <a:xfrm>
-            <a:off x="667512" y="2011680"/>
-            <a:ext cx="347472" cy="347472"/>
-          </a:xfrm>
-          <a:prstGeom prst="rect">
-            <a:avLst/>
-          </a:prstGeom>
-        </p:spPr>
-      </p:pic>
-      <p:sp>
-        <p:nvSpPr>
-          <p:cNvPr id="9" name="Text 6"/>
-          <p:cNvSpPr/>
-          <p:nvPr/>
-        </p:nvSpPr>
-        <p:spPr>
-          <a:xfrm>
-            <a:off x="1106424" y="1938528"/>
-            <a:ext cx="2837688" cy="777240"/>
-          </a:xfrm>
-          <a:prstGeom prst="rect">
-            <a:avLst/>
-          </a:prstGeom>
-          <a:noFill/>
-          <a:ln/>
-        </p:spPr>
-        <p:txBody>
-          <a:bodyPr wrap="square" rtlCol="0" anchor="ctr"/>
-          <a:lstStyle/>
-          <a:p>
-            <a:pPr indent="0" marL="0">
-              <a:lnSpc>
-                <a:spcPct val="100000"/>
-              </a:lnSpc>
-              <a:buNone/>
-            </a:pPr>
-            <a:r>
-              <a:rPr lang="en-US" sz="2000" b="1" dirty="0">
-                <a:solidFill>
-                  <a:srgbClr val="002050"/>
-                </a:solidFill>
-                <a:latin typeface="Aptos Display" pitchFamily="34" charset="0"/>
-                <a:ea typeface="Aptos Display" pitchFamily="34" charset="-122"/>
-                <a:cs typeface="Aptos Display" pitchFamily="34" charset="-120"/>
-              </a:rPr>
-              <a:t>Chair a meeting</a:t>
-            </a:r>
-            <a:endParaRPr lang="en-US" sz="2000" dirty="0"/>
-          </a:p>
-        </p:txBody>
-      </p:sp>
-      <p:sp>
-        <p:nvSpPr>
-          <p:cNvPr id="10" name="Text 7"/>
-          <p:cNvSpPr/>
-          <p:nvPr/>
-        </p:nvSpPr>
-        <p:spPr>
-          <a:xfrm>
-            <a:off x="667512" y="2761488"/>
-            <a:ext cx="3276600" cy="1591056"/>
-          </a:xfrm>
-          <a:prstGeom prst="rect">
-            <a:avLst/>
-          </a:prstGeom>
-          <a:noFill/>
-          <a:ln/>
-        </p:spPr>
-        <p:txBody>
-          <a:bodyPr wrap="square" rtlCol="0" anchor="t"/>
-          <a:lstStyle/>
-          <a:p>
-            <a:pPr indent="0" marL="0">
-              <a:lnSpc>
-                <a:spcPct val="110000"/>
-              </a:lnSpc>
-              <a:buNone/>
-            </a:pPr>
-            <a:r>
-              <a:rPr lang="en-US" sz="1800" dirty="0">
-                <a:solidFill>
-                  <a:srgbClr val="6B7280"/>
-                </a:solidFill>
-                <a:latin typeface="Aptos" pitchFamily="34" charset="0"/>
-                <a:ea typeface="Aptos" pitchFamily="34" charset="-122"/>
-                <a:cs typeface="Aptos" pitchFamily="34" charset="-120"/>
-              </a:rPr>
-              <a:t>Role-play practical: chair a 10-minute technical meeting from a scenario card — observed evidence.</a:t>
-            </a:r>
-            <a:endParaRPr lang="en-US" sz="1800" dirty="0"/>
-          </a:p>
-        </p:txBody>
-      </p:sp>
-      <p:sp>
-        <p:nvSpPr>
-          <p:cNvPr id="11" name="Shape 8"/>
-          <p:cNvSpPr/>
-          <p:nvPr/>
-        </p:nvSpPr>
-        <p:spPr>
-          <a:xfrm>
-            <a:off x="4291584" y="1828800"/>
-            <a:ext cx="3605784" cy="2651760"/>
-          </a:xfrm>
-          <a:prstGeom prst="roundRect">
-            <a:avLst>
-              <a:gd name="adj" fmla="val 3103"/>
-            </a:avLst>
-          </a:prstGeom>
-          <a:solidFill>
-            <a:srgbClr val="FFFFFF"/>
-          </a:solidFill>
-          <a:ln w="12700">
-            <a:solidFill>
-              <a:srgbClr val="D5E3F2"/>
-            </a:solidFill>
-            <a:prstDash val="solid"/>
-          </a:ln>
-          <a:effectLst>
-            <a:outerShdw sx="100000" sy="100000" kx="0" ky="0" algn="bl" rotWithShape="0" blurRad="88900" dist="25400" dir="5400000">
-              <a:srgbClr val="9AB4CC">
-                <a:alpha val="30000"/>
-              </a:srgbClr>
-            </a:outerShdw>
-          </a:effectLst>
-        </p:spPr>
-      </p:sp>
-      <p:pic>
-        <p:nvPicPr>
-          <p:cNvPr id="12" name="Image 1" descr="preencoded.png">    </p:cNvPr>
-          <p:cNvPicPr>
-            <a:picLocks noChangeAspect="1"/>
-          </p:cNvPicPr>
-          <p:nvPr/>
-        </p:nvPicPr>
-        <p:blipFill>
-          <a:blip r:embed="rId3">
-            <a:extLst>
-              <a:ext uri="{96DAC541-7B7A-43D3-8B79-37D633B846F1}">
-                <asvg:svgBlip xmlns:asvg="http://schemas.microsoft.com/office/drawing/2016/SVG/main" r:embed="rId4"/>
-              </a:ext>
-            </a:extLst>
-          </a:blip>
-          <a:stretch>
-            <a:fillRect/>
-          </a:stretch>
-        </p:blipFill>
-        <p:spPr>
-          <a:xfrm>
-            <a:off x="4456176" y="2011680"/>
-            <a:ext cx="347472" cy="347472"/>
-          </a:xfrm>
-          <a:prstGeom prst="rect">
-            <a:avLst/>
-          </a:prstGeom>
-        </p:spPr>
-      </p:pic>
-      <p:sp>
-        <p:nvSpPr>
-          <p:cNvPr id="13" name="Text 9"/>
-          <p:cNvSpPr/>
-          <p:nvPr/>
-        </p:nvSpPr>
-        <p:spPr>
-          <a:xfrm>
-            <a:off x="4895088" y="1938528"/>
-            <a:ext cx="2837688" cy="777240"/>
-          </a:xfrm>
-          <a:prstGeom prst="rect">
-            <a:avLst/>
-          </a:prstGeom>
-          <a:noFill/>
-          <a:ln/>
-        </p:spPr>
-        <p:txBody>
-          <a:bodyPr wrap="square" rtlCol="0" anchor="ctr"/>
-          <a:lstStyle/>
-          <a:p>
-            <a:pPr indent="0" marL="0">
-              <a:lnSpc>
-                <a:spcPct val="100000"/>
-              </a:lnSpc>
-              <a:buNone/>
-            </a:pPr>
-            <a:r>
-              <a:rPr lang="en-US" sz="2000" b="1" dirty="0">
-                <a:solidFill>
-                  <a:srgbClr val="002050"/>
-                </a:solidFill>
-                <a:latin typeface="Aptos Display" pitchFamily="34" charset="0"/>
-                <a:ea typeface="Aptos Display" pitchFamily="34" charset="-122"/>
-                <a:cs typeface="Aptos Display" pitchFamily="34" charset="-120"/>
-              </a:rPr>
-              <a:t>Questioning session</a:t>
-            </a:r>
-            <a:endParaRPr lang="en-US" sz="2000" dirty="0"/>
-          </a:p>
-        </p:txBody>
-      </p:sp>
-      <p:sp>
-        <p:nvSpPr>
-          <p:cNvPr id="14" name="Text 10"/>
-          <p:cNvSpPr/>
-          <p:nvPr/>
-        </p:nvSpPr>
-        <p:spPr>
-          <a:xfrm>
-            <a:off x="4456176" y="2761488"/>
-            <a:ext cx="3276600" cy="1591056"/>
-          </a:xfrm>
-          <a:prstGeom prst="rect">
-            <a:avLst/>
-          </a:prstGeom>
-          <a:noFill/>
-          <a:ln/>
-        </p:spPr>
-        <p:txBody>
-          <a:bodyPr wrap="square" rtlCol="0" anchor="t"/>
-          <a:lstStyle/>
-          <a:p>
-            <a:pPr indent="0" marL="0">
-              <a:lnSpc>
-                <a:spcPct val="110000"/>
-              </a:lnSpc>
-              <a:buNone/>
-            </a:pPr>
-            <a:r>
-              <a:rPr lang="en-US" sz="1800" dirty="0">
-                <a:solidFill>
-                  <a:srgbClr val="6B7280"/>
-                </a:solidFill>
-                <a:latin typeface="Aptos" pitchFamily="34" charset="0"/>
-                <a:ea typeface="Aptos" pitchFamily="34" charset="-122"/>
-                <a:cs typeface="Aptos" pitchFamily="34" charset="-120"/>
-              </a:rPr>
-              <a:t>“Chairing a technical practitioners meeting” — typed answers, AI-marked.</a:t>
-            </a:r>
-            <a:endParaRPr lang="en-US" sz="1800" dirty="0"/>
-          </a:p>
-        </p:txBody>
-      </p:sp>
-      <p:sp>
-        <p:nvSpPr>
-          <p:cNvPr id="15" name="Shape 11"/>
-          <p:cNvSpPr/>
-          <p:nvPr/>
-        </p:nvSpPr>
-        <p:spPr>
-          <a:xfrm>
-            <a:off x="8080248" y="1828800"/>
-            <a:ext cx="3605784" cy="2651760"/>
-          </a:xfrm>
-          <a:prstGeom prst="roundRect">
-            <a:avLst>
-              <a:gd name="adj" fmla="val 3103"/>
-            </a:avLst>
-          </a:prstGeom>
-          <a:solidFill>
-            <a:srgbClr val="FFFFFF"/>
-          </a:solidFill>
-          <a:ln w="12700">
-            <a:solidFill>
-              <a:srgbClr val="D5E3F2"/>
-            </a:solidFill>
-            <a:prstDash val="solid"/>
-          </a:ln>
-          <a:effectLst>
-            <a:outerShdw sx="100000" sy="100000" kx="0" ky="0" algn="bl" rotWithShape="0" blurRad="88900" dist="25400" dir="5400000">
-              <a:srgbClr val="9AB4CC">
-                <a:alpha val="30000"/>
-              </a:srgbClr>
-            </a:outerShdw>
-          </a:effectLst>
-        </p:spPr>
-      </p:sp>
-      <p:pic>
-        <p:nvPicPr>
-          <p:cNvPr id="16" name="Image 2" descr="preencoded.png">    </p:cNvPr>
-          <p:cNvPicPr>
-            <a:picLocks noChangeAspect="1"/>
-          </p:cNvPicPr>
-          <p:nvPr/>
-        </p:nvPicPr>
-        <p:blipFill>
-          <a:blip r:embed="rId5">
-            <a:extLst>
-              <a:ext uri="{96DAC541-7B7A-43D3-8B79-37D633B846F1}">
-                <asvg:svgBlip xmlns:asvg="http://schemas.microsoft.com/office/drawing/2016/SVG/main" r:embed="rId6"/>
-              </a:ext>
-            </a:extLst>
-          </a:blip>
-          <a:stretch>
-            <a:fillRect/>
-          </a:stretch>
-        </p:blipFill>
-        <p:spPr>
-          <a:xfrm>
-            <a:off x="8244840" y="2011680"/>
-            <a:ext cx="347472" cy="347472"/>
-          </a:xfrm>
-          <a:prstGeom prst="rect">
-            <a:avLst/>
-          </a:prstGeom>
-        </p:spPr>
-      </p:pic>
-      <p:sp>
-        <p:nvSpPr>
-          <p:cNvPr id="17" name="Text 12"/>
-          <p:cNvSpPr/>
-          <p:nvPr/>
-        </p:nvSpPr>
-        <p:spPr>
-          <a:xfrm>
-            <a:off x="8683752" y="1938528"/>
-            <a:ext cx="2837688" cy="777240"/>
-          </a:xfrm>
-          <a:prstGeom prst="rect">
-            <a:avLst/>
-          </a:prstGeom>
-          <a:noFill/>
-          <a:ln/>
-        </p:spPr>
-        <p:txBody>
-          <a:bodyPr wrap="square" rtlCol="0" anchor="ctr"/>
-          <a:lstStyle/>
-          <a:p>
-            <a:pPr indent="0" marL="0">
-              <a:lnSpc>
-                <a:spcPct val="100000"/>
-              </a:lnSpc>
-              <a:buNone/>
-            </a:pPr>
-            <a:r>
-              <a:rPr lang="en-US" sz="2000" b="1" dirty="0">
-                <a:solidFill>
-                  <a:srgbClr val="002050"/>
-                </a:solidFill>
-                <a:latin typeface="Aptos Display" pitchFamily="34" charset="0"/>
-                <a:ea typeface="Aptos Display" pitchFamily="34" charset="-122"/>
-                <a:cs typeface="Aptos Display" pitchFamily="34" charset="-120"/>
-              </a:rPr>
-              <a:t>Quiz 3</a:t>
-            </a:r>
-            <a:endParaRPr lang="en-US" sz="2000" dirty="0"/>
-          </a:p>
-        </p:txBody>
-      </p:sp>
-      <p:sp>
-        <p:nvSpPr>
-          <p:cNvPr id="18" name="Text 13"/>
-          <p:cNvSpPr/>
-          <p:nvPr/>
-        </p:nvSpPr>
-        <p:spPr>
-          <a:xfrm>
-            <a:off x="8244840" y="2761488"/>
-            <a:ext cx="3276600" cy="1591056"/>
-          </a:xfrm>
-          <a:prstGeom prst="rect">
-            <a:avLst/>
-          </a:prstGeom>
-          <a:noFill/>
-          <a:ln/>
-        </p:spPr>
-        <p:txBody>
-          <a:bodyPr wrap="square" rtlCol="0" anchor="t"/>
-          <a:lstStyle/>
-          <a:p>
-            <a:pPr indent="0" marL="0">
-              <a:lnSpc>
-                <a:spcPct val="110000"/>
-              </a:lnSpc>
-              <a:buNone/>
-            </a:pPr>
-            <a:r>
-              <a:rPr lang="en-US" sz="1800" dirty="0">
-                <a:solidFill>
-                  <a:srgbClr val="6B7280"/>
-                </a:solidFill>
-                <a:latin typeface="Aptos" pitchFamily="34" charset="0"/>
-                <a:ea typeface="Aptos" pitchFamily="34" charset="-122"/>
-                <a:cs typeface="Aptos" pitchFamily="34" charset="-120"/>
-              </a:rPr>
-              <a:t>Preparing and chairing the meeting. 80%+ is competent.</a:t>
-            </a:r>
-            <a:endParaRPr lang="en-US" sz="1800" dirty="0"/>
-          </a:p>
-        </p:txBody>
-      </p:sp>
-    </p:spTree>
-  </p:cSld>
-  <p:clrMapOvr>
-    <a:masterClrMapping/>
-  </p:clrMapOvr>
-</p:sld>
-</file>
-
-<file path=ppt/slides/slide7.xml><?xml version="1.0" encoding="utf-8"?>
-<p:sld xmlns:a="http://schemas.openxmlformats.org/drawingml/2006/main" xmlns:r="http://schemas.openxmlformats.org/officeDocument/2006/relationships" xmlns:p="http://schemas.openxmlformats.org/presentationml/2006/main">
-  <p:cSld name="Slide 7">
-    <p:bg>
-      <p:bgPr>
-        <a:solidFill>
-          <a:srgbClr val="002050"/>
-        </a:solidFill>
-      </p:bgPr>
-    </p:bg>
-    <p:spTree>
-      <p:nvGrpSpPr>
-        <p:cNvPr id="1" name=""/>
-        <p:cNvGrpSpPr/>
-        <p:nvPr/>
-      </p:nvGrpSpPr>
-      <p:grpSpPr>
-        <a:xfrm>
-          <a:off x="0" y="0"/>
-          <a:ext cx="0" cy="0"/>
-          <a:chOff x="0" y="0"/>
-          <a:chExt cx="0" cy="0"/>
-        </a:xfrm>
-      </p:grpSpPr>
-      <p:sp>
-        <p:nvSpPr>
-          <p:cNvPr id="2" name="Text 0"/>
-          <p:cNvSpPr/>
-          <p:nvPr/>
-        </p:nvSpPr>
-        <p:spPr>
-          <a:xfrm>
-            <a:off x="502920" y="6400800"/>
-            <a:ext cx="10268712" cy="347472"/>
-          </a:xfrm>
-          <a:prstGeom prst="rect">
-            <a:avLst/>
-          </a:prstGeom>
-          <a:noFill/>
-          <a:ln/>
-        </p:spPr>
-        <p:txBody>
-          <a:bodyPr wrap="square" rtlCol="0" anchor="ctr"/>
-          <a:lstStyle/>
-          <a:p>
-            <a:pPr indent="0" marL="0">
-              <a:buNone/>
-            </a:pPr>
-            <a:r>
-              <a:rPr lang="en-US" sz="1800" dirty="0">
-                <a:solidFill>
-                  <a:srgbClr val="6B7280"/>
-                </a:solidFill>
-                <a:latin typeface="Aptos" pitchFamily="34" charset="0"/>
-                <a:ea typeface="Aptos" pitchFamily="34" charset="-122"/>
-                <a:cs typeface="Aptos" pitchFamily="34" charset="-120"/>
-              </a:rPr>
-              <a:t>US 114051 · Conduct a technical practitioners meeting · NQF 5 · 4 credits</a:t>
-            </a:r>
-            <a:endParaRPr lang="en-US" sz="1800" dirty="0"/>
-          </a:p>
-        </p:txBody>
-      </p:sp>
-      <p:sp>
-        <p:nvSpPr>
-          <p:cNvPr id="3" name="Text 1"/>
-          <p:cNvSpPr/>
-          <p:nvPr/>
-        </p:nvSpPr>
-        <p:spPr>
-          <a:xfrm>
-            <a:off x="11045952" y="6400800"/>
-            <a:ext cx="640080" cy="347472"/>
-          </a:xfrm>
-          <a:prstGeom prst="rect">
-            <a:avLst/>
-          </a:prstGeom>
-          <a:noFill/>
-          <a:ln/>
-        </p:spPr>
-        <p:txBody>
-          <a:bodyPr wrap="square" rtlCol="0" anchor="ctr"/>
-          <a:lstStyle/>
-          <a:p>
-            <a:pPr algn="r" indent="0" marL="0">
-              <a:buNone/>
-            </a:pPr>
-            <a:r>
-              <a:rPr lang="en-US" sz="1800" dirty="0">
-                <a:solidFill>
-                  <a:srgbClr val="6B7280"/>
-                </a:solidFill>
-                <a:latin typeface="Aptos" pitchFamily="34" charset="0"/>
-                <a:ea typeface="Aptos" pitchFamily="34" charset="-122"/>
-                <a:cs typeface="Aptos" pitchFamily="34" charset="-120"/>
-              </a:rPr>
-              <a:t>7</a:t>
-            </a:r>
-            <a:endParaRPr lang="en-US" sz="1800" dirty="0"/>
-          </a:p>
-        </p:txBody>
-      </p:sp>
-      <p:sp>
-        <p:nvSpPr>
-          <p:cNvPr id="4" name="Shape 2"/>
-          <p:cNvSpPr/>
-          <p:nvPr/>
-        </p:nvSpPr>
-        <p:spPr>
-          <a:xfrm>
-            <a:off x="0" y="0"/>
-            <a:ext cx="12188952" cy="82296"/>
-          </a:xfrm>
-          <a:prstGeom prst="rect">
-            <a:avLst/>
-          </a:prstGeom>
-          <a:solidFill>
-            <a:srgbClr val="0F6CBD"/>
-          </a:solidFill>
-          <a:ln/>
-        </p:spPr>
-      </p:sp>
-      <p:sp>
-        <p:nvSpPr>
-          <p:cNvPr id="5" name="Shape 3"/>
-          <p:cNvSpPr/>
-          <p:nvPr/>
-        </p:nvSpPr>
-        <p:spPr>
-          <a:xfrm>
-            <a:off x="0" y="0"/>
-            <a:ext cx="12188952" cy="109728"/>
-          </a:xfrm>
-          <a:prstGeom prst="rect">
-            <a:avLst/>
-          </a:prstGeom>
-          <a:solidFill>
-            <a:srgbClr val="0F6CBD"/>
-          </a:solidFill>
-          <a:ln/>
-        </p:spPr>
-      </p:sp>
-      <p:pic>
-        <p:nvPicPr>
-          <p:cNvPr id="6" name="Image 0" descr="preencoded.png">    </p:cNvPr>
-          <p:cNvPicPr>
-            <a:picLocks noChangeAspect="1"/>
-          </p:cNvPicPr>
-          <p:nvPr/>
-        </p:nvPicPr>
-        <p:blipFill>
-          <a:blip r:embed="rId1">
-            <a:extLst>
-              <a:ext uri="{96DAC541-7B7A-43D3-8B79-37D633B846F1}">
-                <asvg:svgBlip xmlns:asvg="http://schemas.microsoft.com/office/drawing/2016/SVG/main" r:embed="rId2"/>
-              </a:ext>
-            </a:extLst>
-          </a:blip>
-          <a:stretch>
-            <a:fillRect/>
-          </a:stretch>
-        </p:blipFill>
-        <p:spPr>
-          <a:xfrm>
-            <a:off x="502920" y="1463040"/>
-            <a:ext cx="640080" cy="640080"/>
-          </a:xfrm>
-          <a:prstGeom prst="rect">
-            <a:avLst/>
-          </a:prstGeom>
-        </p:spPr>
-      </p:pic>
-      <p:sp>
-        <p:nvSpPr>
-          <p:cNvPr id="7" name="Text 4"/>
-          <p:cNvSpPr/>
-          <p:nvPr/>
-        </p:nvSpPr>
-        <p:spPr>
-          <a:xfrm>
-            <a:off x="502920" y="2240280"/>
-            <a:ext cx="11183112" cy="1280160"/>
-          </a:xfrm>
-          <a:prstGeom prst="rect">
-            <a:avLst/>
-          </a:prstGeom>
-          <a:noFill/>
-          <a:ln/>
-        </p:spPr>
-        <p:txBody>
-          <a:bodyPr wrap="square" rtlCol="0" anchor="ctr"/>
-          <a:lstStyle/>
-          <a:p>
-            <a:pPr indent="0" marL="0">
-              <a:buNone/>
-            </a:pPr>
-            <a:r>
-              <a:rPr lang="en-US" sz="3600" b="1" dirty="0">
-                <a:solidFill>
-                  <a:srgbClr val="FFFFFF"/>
-                </a:solidFill>
-                <a:latin typeface="Aptos Display" pitchFamily="34" charset="0"/>
-                <a:ea typeface="Aptos Display" pitchFamily="34" charset="-122"/>
-                <a:cs typeface="Aptos Display" pitchFamily="34" charset="-120"/>
-              </a:rPr>
-              <a:t>Run the meeting — don't let the meeting run you.</a:t>
-            </a:r>
-            <a:endParaRPr lang="en-US" sz="3600" dirty="0"/>
-          </a:p>
-        </p:txBody>
-      </p:sp>
-      <p:sp>
-        <p:nvSpPr>
-          <p:cNvPr id="8" name="Text 5"/>
-          <p:cNvSpPr/>
-          <p:nvPr/>
-        </p:nvSpPr>
-        <p:spPr>
-          <a:xfrm>
-            <a:off x="502920" y="3611880"/>
-            <a:ext cx="10058400" cy="1280160"/>
-          </a:xfrm>
-          <a:prstGeom prst="rect">
-            <a:avLst/>
-          </a:prstGeom>
-          <a:noFill/>
-          <a:ln/>
-        </p:spPr>
-        <p:txBody>
-          <a:bodyPr wrap="square" rtlCol="0" anchor="ctr"/>
-          <a:lstStyle/>
-          <a:p>
-            <a:pPr indent="0" marL="0">
-              <a:lnSpc>
-                <a:spcPct val="125000"/>
-              </a:lnSpc>
-              <a:buNone/>
-            </a:pPr>
-            <a:r>
-              <a:rPr lang="en-US" sz="1800" dirty="0">
-                <a:solidFill>
-                  <a:srgbClr val="B9D6F2"/>
-                </a:solidFill>
-                <a:latin typeface="Aptos" pitchFamily="34" charset="0"/>
-                <a:ea typeface="Aptos" pitchFamily="34" charset="-122"/>
-                <a:cs typeface="Aptos" pitchFamily="34" charset="-120"/>
-              </a:rPr>
-              <a:t>Rules agreed with the members » conventions applied » the agenda followed » everyone heard » topics prioritised » decisions that are clear, accurate and time-framed.</a:t>
-            </a:r>
-            <a:endParaRPr lang="en-US" sz="1800" dirty="0"/>
-          </a:p>
-        </p:txBody>
-      </p:sp>
-      <p:sp>
-        <p:nvSpPr>
-          <p:cNvPr id="9" name="Text 6"/>
-          <p:cNvSpPr/>
-          <p:nvPr/>
-        </p:nvSpPr>
-        <p:spPr>
-          <a:xfrm>
-            <a:off x="502920" y="6291072"/>
-            <a:ext cx="11183112" cy="365760"/>
-          </a:xfrm>
-          <a:prstGeom prst="rect">
-            <a:avLst/>
-          </a:prstGeom>
-          <a:noFill/>
-          <a:ln/>
-        </p:spPr>
-        <p:txBody>
-          <a:bodyPr wrap="square" rtlCol="0" anchor="ctr"/>
-          <a:lstStyle/>
-          <a:p>
-            <a:pPr indent="0" marL="0">
-              <a:buNone/>
-            </a:pPr>
-            <a:r>
-              <a:rPr lang="en-US" sz="1800" dirty="0">
-                <a:solidFill>
-                  <a:srgbClr val="6E93BC"/>
-                </a:solidFill>
-                <a:latin typeface="Aptos" pitchFamily="34" charset="0"/>
-                <a:ea typeface="Aptos" pitchFamily="34" charset="-122"/>
-                <a:cs typeface="Aptos" pitchFamily="34" charset="-120"/>
-              </a:rPr>
-              <a:t>US 114051 · National Certificate: IT — System Support · SAQA ID 48573 · ITSS Learn</a:t>
-            </a:r>
-            <a:endParaRPr lang="en-US" sz="1800" dirty="0"/>
-          </a:p>
-        </p:txBody>
-      </p:sp>
     </p:spTree>
   </p:cSld>
   <p:clrMapOvr>
